--- a/Docs/AURA_SENTINEL_SIH2026_OFFICIAL_SUBMISSION.pptx
+++ b/Docs/AURA_SENTINEL_SIH2026_OFFICIAL_SUBMISSION.pptx
@@ -9758,7 +9758,7 @@
       </p:sp>
       <p:pic>
         <p:nvPicPr>
-          <p:cNvPr id="17411" name="Picture 17410" descr="slide6_uiux.png"/>
+          <p:cNvPr id="17411" name="Picture 17410" descr="slide6_uiux_composite.png"/>
           <p:cNvPicPr>
             <a:picLocks noChangeAspect="1"/>
           </p:cNvPicPr>

--- a/Docs/AURA_SENTINEL_SIH2026_OFFICIAL_SUBMISSION.pptx
+++ b/Docs/AURA_SENTINEL_SIH2026_OFFICIAL_SUBMISSION.pptx
@@ -4665,407 +4665,9 @@
           <a:chExt cx="0" cy="0"/>
         </a:xfrm>
       </p:grpSpPr>
-      <p:sp useBgFill="1">
-        <p:nvSpPr>
-          <p:cNvPr id="36" name="Rectangle 24">
-            <a:extLst>
-              <a:ext uri="{FF2B5EF4-FFF2-40B4-BE49-F238E27FC236}">
-                <a16:creationId xmlns:a16="http://schemas.microsoft.com/office/drawing/2014/main" id="{3E443FD7-A66B-4AA0-872D-B088B9BC5F17}"/>
-              </a:ext>
-              <a:ext uri="{C183D7F6-B498-43B3-948B-1728B52AA6E4}">
-                <adec:decorative xmlns:adec="http://schemas.microsoft.com/office/drawing/2017/decorative" xmlns="" val="1"/>
-              </a:ext>
-            </a:extLst>
-          </p:cNvPr>
-          <p:cNvSpPr>
-            <a:spLocks noGrp="1" noRot="1" noChangeAspect="1" noMove="1" noResize="1" noEditPoints="1" noAdjustHandles="1" noChangeArrowheads="1" noChangeShapeType="1" noTextEdit="1"/>
-          </p:cNvSpPr>
-          <p:nvPr>
-            <p:extLst>
-              <p:ext uri="{386F3935-93C4-4BCD-93E2-E3B085C9AB24}">
-                <p16:designElem xmlns:p16="http://schemas.microsoft.com/office/powerpoint/2015/main" val="1"/>
-              </p:ext>
-            </p:extLst>
-          </p:nvPr>
-        </p:nvSpPr>
-        <p:spPr>
-          <a:xfrm>
-            <a:off x="1524000" y="0"/>
-            <a:ext cx="9144000" cy="6858000"/>
-          </a:xfrm>
-          <a:prstGeom prst="rect">
-            <a:avLst/>
-          </a:prstGeom>
-          <a:ln>
-            <a:noFill/>
-          </a:ln>
-        </p:spPr>
-        <p:style>
-          <a:lnRef idx="2">
-            <a:schemeClr val="accent1">
-              <a:shade val="50000"/>
-            </a:schemeClr>
-          </a:lnRef>
-          <a:fillRef idx="1">
-            <a:schemeClr val="accent1"/>
-          </a:fillRef>
-          <a:effectRef idx="0">
-            <a:schemeClr val="accent1"/>
-          </a:effectRef>
-          <a:fontRef idx="minor">
-            <a:schemeClr val="lt1"/>
-          </a:fontRef>
-        </p:style>
-        <p:txBody>
-          <a:bodyPr rtlCol="0" anchor="ctr"/>
-          <a:lstStyle/>
-          <a:p>
-            <a:pPr algn="ctr"/>
-            <a:endParaRPr lang="en-US"/>
-          </a:p>
-        </p:txBody>
-      </p:sp>
-      <p:sp>
-        <p:nvSpPr>
-          <p:cNvPr id="4" name="Subtitle 3"/>
-          <p:cNvSpPr>
-            <a:spLocks noGrp="1"/>
-          </p:cNvSpPr>
-          <p:nvPr>
-            <p:ph type="subTitle" idx="1"/>
-          </p:nvPr>
-        </p:nvSpPr>
-        <p:spPr>
-          <a:xfrm>
-            <a:off x="1245686" y="648614"/>
-            <a:ext cx="8534400" cy="1752600"/>
-          </a:xfrm>
-        </p:spPr>
-        <p:txBody>
-          <a:bodyPr/>
-          <a:lstStyle/>
-          <a:p>
-            <a:endParaRPr lang="en-US" b="1" dirty="0">
-              <a:solidFill>
-                <a:schemeClr val="tx1"/>
-              </a:solidFill>
-              <a:latin typeface="Times New Roman" panose="02020603050405020304" pitchFamily="18" charset="0"/>
-              <a:cs typeface="Times New Roman" panose="02020603050405020304" pitchFamily="18" charset="0"/>
-            </a:endParaRPr>
-          </a:p>
-        </p:txBody>
-      </p:sp>
-      <p:sp>
-        <p:nvSpPr>
-          <p:cNvPr id="8" name="Title 7"/>
-          <p:cNvSpPr>
-            <a:spLocks noGrp="1"/>
-          </p:cNvSpPr>
-          <p:nvPr>
-            <p:ph type="ctrTitle"/>
-          </p:nvPr>
-        </p:nvSpPr>
-        <p:spPr>
-          <a:xfrm>
-            <a:off x="331286" y="-526757"/>
-            <a:ext cx="10363200" cy="2076450"/>
-          </a:xfrm>
-        </p:spPr>
-        <p:txBody>
-          <a:bodyPr/>
-          <a:lstStyle/>
-          <a:p>
-            <a:r>
-              <a:rPr lang="en-US" sz="4000" b="1" dirty="0">
-                <a:solidFill>
-                  <a:schemeClr val="tx2"/>
-                </a:solidFill>
-                <a:latin typeface="Garamond" panose="02020404030301010803" pitchFamily="18" charset="0"/>
-              </a:rPr>
-              <a:t>SMART INDIA HACKATHON </a:t>
-            </a:r>
-            <a:r>
-              <a:rPr lang="en-US" sz="4000" b="1" dirty="0" smtClean="0">
-                <a:solidFill>
-                  <a:schemeClr val="tx2"/>
-                </a:solidFill>
-                <a:latin typeface="Garamond" panose="02020404030301010803" pitchFamily="18" charset="0"/>
-              </a:rPr>
-              <a:t>2026</a:t>
-            </a:r>
-            <a:endParaRPr lang="en-IN" sz="4000" b="1" dirty="0">
-              <a:solidFill>
-                <a:schemeClr val="tx2"/>
-              </a:solidFill>
-              <a:latin typeface="Garamond" panose="02020404030301010803" pitchFamily="18" charset="0"/>
-            </a:endParaRPr>
-          </a:p>
-        </p:txBody>
-      </p:sp>
-      <p:sp>
-        <p:nvSpPr>
-          <p:cNvPr id="10" name="TextBox 9"/>
-          <p:cNvSpPr txBox="1"/>
-          <p:nvPr/>
-        </p:nvSpPr>
-        <p:spPr>
-          <a:xfrm>
-            <a:off x="331286" y="2076450"/>
-            <a:ext cx="5924550" cy="4703019"/>
-          </a:xfrm>
-          <a:prstGeom prst="rect">
-            <a:avLst/>
-          </a:prstGeom>
-          <a:noFill/>
-        </p:spPr>
-        <p:txBody>
-          <a:bodyPr wrap="square" rtlCol="0">
-            <a:spAutoFit/>
-          </a:bodyPr>
-          <a:lstStyle/>
-          <a:p>
-            <a:pPr>
-              <a:spcAft>
-                <a:spcPts val="800"/>
-              </a:spcAft>
-            </a:pPr>
-            <a:r>
-              <a:rPr b="1" sz="1150">
-                <a:solidFill>
-                  <a:srgbClr val="0F172A"/>
-                </a:solidFill>
-              </a:rPr>
-              <a:t>Problem Statement ID:</a:t>
-            </a:r>
-            <a:r>
-              <a:rPr b="0" sz="1150">
-                <a:solidFill>
-                  <a:srgbClr val="1E293B"/>
-                </a:solidFill>
-              </a:rPr>
-              <a:t> SIH26105</a:t>
-            </a:r>
-            <a:endParaRPr lang="en-US" dirty="0"/>
-          </a:p>
-          <a:p>
-            <a:pPr>
-              <a:spcAft>
-                <a:spcPts val="800"/>
-              </a:spcAft>
-            </a:pPr>
-            <a:r>
-              <a:rPr b="1" sz="1150">
-                <a:solidFill>
-                  <a:srgbClr val="0F172A"/>
-                </a:solidFill>
-              </a:rPr>
-              <a:t>Problem Statement Title:</a:t>
-            </a:r>
-            <a:r>
-              <a:rPr b="0" sz="1150">
-                <a:solidFill>
-                  <a:srgbClr val="1E293B"/>
-                </a:solidFill>
-              </a:rPr>
-              <a:t> AI-Powered Continuous Cyber Risk Quantification &amp; Investment Optimization Platform</a:t>
-            </a:r>
-          </a:p>
-          <a:p>
-            <a:pPr>
-              <a:spcAft>
-                <a:spcPts val="800"/>
-              </a:spcAft>
-            </a:pPr>
-            <a:r>
-              <a:rPr b="1" sz="1150">
-                <a:solidFill>
-                  <a:srgbClr val="0F172A"/>
-                </a:solidFill>
-              </a:rPr>
-              <a:t>Theme:</a:t>
-            </a:r>
-            <a:r>
-              <a:rPr b="0" sz="1150">
-                <a:solidFill>
-                  <a:srgbClr val="1E293B"/>
-                </a:solidFill>
-              </a:rPr>
-              <a:t> Blockchain &amp; Cybersecurity</a:t>
-            </a:r>
-          </a:p>
-          <a:p>
-            <a:pPr>
-              <a:spcAft>
-                <a:spcPts val="800"/>
-              </a:spcAft>
-            </a:pPr>
-            <a:r>
-              <a:rPr b="1" sz="1150">
-                <a:solidFill>
-                  <a:srgbClr val="0F172A"/>
-                </a:solidFill>
-              </a:rPr>
-              <a:t>PS Category:</a:t>
-            </a:r>
-            <a:r>
-              <a:rPr b="0" sz="1150">
-                <a:solidFill>
-                  <a:srgbClr val="1E293B"/>
-                </a:solidFill>
-              </a:rPr>
-              <a:t> Software</a:t>
-            </a:r>
-          </a:p>
-          <a:p>
-            <a:pPr>
-              <a:spcAft>
-                <a:spcPts val="800"/>
-              </a:spcAft>
-            </a:pPr>
-            <a:r>
-              <a:rPr b="1" sz="1150">
-                <a:solidFill>
-                  <a:srgbClr val="0F172A"/>
-                </a:solidFill>
-              </a:rPr>
-              <a:t>Team ID:</a:t>
-            </a:r>
-            <a:r>
-              <a:rPr b="0" sz="1150">
-                <a:solidFill>
-                  <a:srgbClr val="1E293B"/>
-                </a:solidFill>
-              </a:rPr>
-              <a:t> 180219</a:t>
-            </a:r>
-          </a:p>
-          <a:p>
-            <a:pPr>
-              <a:spcAft>
-                <a:spcPts val="800"/>
-              </a:spcAft>
-            </a:pPr>
-            <a:r>
-              <a:rPr b="1" sz="1150">
-                <a:solidFill>
-                  <a:srgbClr val="0F172A"/>
-                </a:solidFill>
-              </a:rPr>
-              <a:t>Team Name:</a:t>
-            </a:r>
-            <a:r>
-              <a:rPr b="0" sz="1150">
-                <a:solidFill>
-                  <a:srgbClr val="1E293B"/>
-                </a:solidFill>
-              </a:rPr>
-              <a:t> ByteForce_1</a:t>
-            </a:r>
-          </a:p>
-          <a:p>
-            <a:pPr>
-              <a:spcAft>
-                <a:spcPts val="800"/>
-              </a:spcAft>
-            </a:pPr>
-            <a:r>
-              <a:rPr b="1" sz="1150">
-                <a:solidFill>
-                  <a:srgbClr val="0F172A"/>
-                </a:solidFill>
-              </a:rPr>
-              <a:t>Team Leader:</a:t>
-            </a:r>
-            <a:r>
-              <a:rPr b="0" sz="1150">
-                <a:solidFill>
-                  <a:srgbClr val="1E293B"/>
-                </a:solidFill>
-              </a:rPr>
-              <a:t> Aryan Baghel</a:t>
-            </a:r>
-          </a:p>
-          <a:p>
-            <a:pPr>
-              <a:spcAft>
-                <a:spcPts val="800"/>
-              </a:spcAft>
-            </a:pPr>
-            <a:r>
-              <a:rPr b="1" sz="1150">
-                <a:solidFill>
-                  <a:srgbClr val="0F172A"/>
-                </a:solidFill>
-              </a:rPr>
-              <a:t>Team Members:</a:t>
-            </a:r>
-            <a:r>
-              <a:rPr b="0" sz="1150">
-                <a:solidFill>
-                  <a:srgbClr val="1E293B"/>
-                </a:solidFill>
-              </a:rPr>
-              <a:t> Kirti, Hitesh Chauhan, Avinav Jha, Sharim Khan, Aman Sekh</a:t>
-            </a:r>
-          </a:p>
-          <a:p>
-            <a:pPr>
-              <a:spcAft>
-                <a:spcPts val="800"/>
-              </a:spcAft>
-            </a:pPr>
-            <a:r>
-              <a:rPr b="1" sz="1150">
-                <a:solidFill>
-                  <a:srgbClr val="0F172A"/>
-                </a:solidFill>
-              </a:rPr>
-              <a:t>Institute:</a:t>
-            </a:r>
-            <a:r>
-              <a:rPr b="0" sz="1150">
-                <a:solidFill>
-                  <a:srgbClr val="1E293B"/>
-                </a:solidFill>
-              </a:rPr>
-              <a:t> Skyline Institute of Engineering and Technology, Greater Noida</a:t>
-            </a:r>
-          </a:p>
-        </p:txBody>
-      </p:sp>
       <p:pic>
         <p:nvPicPr>
-          <p:cNvPr id="2" name="Picture 1"/>
-          <p:cNvPicPr>
-            <a:picLocks noChangeAspect="1"/>
-          </p:cNvPicPr>
-          <p:nvPr/>
-        </p:nvPicPr>
-        <p:blipFill>
-          <a:blip r:embed="rId3">
-            <a:extLst>
-              <a:ext uri="{28A0092B-C50C-407E-A947-70E740481C1C}">
-                <a14:useLocalDpi xmlns:a14="http://schemas.microsoft.com/office/drawing/2010/main" val="0"/>
-              </a:ext>
-            </a:extLst>
-          </a:blip>
-          <a:stretch>
-            <a:fillRect/>
-          </a:stretch>
-        </p:blipFill>
-        <p:spPr>
-          <a:xfrm>
-            <a:off x="9780086" y="1500"/>
-            <a:ext cx="2249850" cy="1062337"/>
-          </a:xfrm>
-          <a:prstGeom prst="rect">
-            <a:avLst/>
-          </a:prstGeom>
-        </p:spPr>
-      </p:pic>
-      <p:pic>
-        <p:nvPicPr>
-          <p:cNvPr id="37" name="Picture 36" descr="slide1_visual.png"/>
+          <p:cNvPr id="2" name="Picture 1" descr="slide_1.png"/>
           <p:cNvPicPr>
             <a:picLocks noChangeAspect="1"/>
           </p:cNvPicPr>
@@ -5079,8 +4681,8 @@
         </p:blipFill>
         <p:spPr>
           <a:xfrm>
-            <a:off x="6492240" y="1188720"/>
-            <a:ext cx="5120640" cy="4754880"/>
+            <a:off x="0" y="0"/>
+            <a:ext cx="12191969" cy="6858000"/>
           </a:xfrm>
           <a:prstGeom prst="rect">
             <a:avLst/>
@@ -5112,634 +4714,9 @@
           <a:chExt cx="0" cy="0"/>
         </a:xfrm>
       </p:grpSpPr>
-      <p:sp>
-        <p:nvSpPr>
-          <p:cNvPr id="9" name="Rectangle 8"/>
-          <p:cNvSpPr>
-            <a:spLocks noChangeArrowheads="1"/>
-          </p:cNvSpPr>
-          <p:nvPr/>
-        </p:nvSpPr>
-        <p:spPr bwMode="auto">
-          <a:xfrm>
-            <a:off x="0" y="6354762"/>
-            <a:ext cx="12191999" cy="503238"/>
-          </a:xfrm>
-          <a:prstGeom prst="rect">
-            <a:avLst/>
-          </a:prstGeom>
-          <a:solidFill>
-            <a:srgbClr val="0070C0"/>
-          </a:solidFill>
-          <a:ln w="9525">
-            <a:noFill/>
-            <a:miter lim="800000"/>
-            <a:headEnd/>
-            <a:tailEnd/>
-          </a:ln>
-          <a:effectLst>
-            <a:outerShdw dist="23000" dir="5400000" rotWithShape="0">
-              <a:srgbClr val="808080">
-                <a:alpha val="34999"/>
-              </a:srgbClr>
-            </a:outerShdw>
-          </a:effectLst>
-        </p:spPr>
-        <p:txBody>
-          <a:bodyPr anchor="ctr"/>
-          <a:lstStyle/>
-          <a:p>
-            <a:pPr algn="ctr" fontAlgn="auto">
-              <a:spcBef>
-                <a:spcPts val="0"/>
-              </a:spcBef>
-              <a:spcAft>
-                <a:spcPts val="0"/>
-              </a:spcAft>
-              <a:defRPr/>
-            </a:pPr>
-            <a:endParaRPr lang="en-US" dirty="0">
-              <a:solidFill>
-                <a:schemeClr val="accent2">
-                  <a:lumMod val="75000"/>
-                </a:schemeClr>
-              </a:solidFill>
-              <a:latin typeface="+mn-lt"/>
-              <a:ea typeface="+mn-ea"/>
-            </a:endParaRPr>
-          </a:p>
-        </p:txBody>
-      </p:sp>
-      <p:sp>
-        <p:nvSpPr>
-          <p:cNvPr id="15361" name="Title 1"/>
-          <p:cNvSpPr>
-            <a:spLocks noGrp="1"/>
-          </p:cNvSpPr>
-          <p:nvPr>
-            <p:ph type="title"/>
-          </p:nvPr>
-        </p:nvSpPr>
-        <p:spPr>
-          <a:xfrm>
-            <a:off x="182998" y="0"/>
-            <a:ext cx="10972800" cy="1143000"/>
-          </a:xfrm>
-        </p:spPr>
-        <p:txBody>
-          <a:bodyPr/>
-          <a:lstStyle/>
-          <a:p>
-            <a:pPr>
-              <a:defRPr sz="2000" b="1">
-                <a:solidFill>
-                  <a:srgbClr val="0F172A"/>
-                </a:solidFill>
-              </a:defRPr>
-            </a:pPr>
-            <a:r>
-              <a:t>IDEA TITLE: AURA SENTINEL (AI-POWERED CYBER RISK QUANTIFICATION)</a:t>
-            </a:r>
-          </a:p>
-        </p:txBody>
-      </p:sp>
-      <p:sp>
-        <p:nvSpPr>
-          <p:cNvPr id="6" name="Slide Number Placeholder 5"/>
-          <p:cNvSpPr>
-            <a:spLocks noGrp="1"/>
-          </p:cNvSpPr>
-          <p:nvPr>
-            <p:ph type="sldNum" sz="quarter" idx="12"/>
-          </p:nvPr>
-        </p:nvSpPr>
-        <p:spPr/>
-        <p:txBody>
-          <a:bodyPr/>
-          <a:lstStyle/>
-          <a:p>
-            <a:fld id="{677C3CE7-23F7-4828-823C-E0205DF2CF97}" type="slidenum">
-              <a:rPr lang="en-US" b="1" smtClean="0">
-                <a:solidFill>
-                  <a:schemeClr val="bg1"/>
-                </a:solidFill>
-              </a:rPr>
-              <a:pPr/>
-              <a:t>2</a:t>
-            </a:fld>
-            <a:endParaRPr lang="en-US" b="1" dirty="0">
-              <a:solidFill>
-                <a:schemeClr val="bg1"/>
-              </a:solidFill>
-            </a:endParaRPr>
-          </a:p>
-        </p:txBody>
-      </p:sp>
-      <p:sp>
-        <p:nvSpPr>
-          <p:cNvPr id="7" name="Footer Placeholder 6"/>
-          <p:cNvSpPr>
-            <a:spLocks noGrp="1"/>
-          </p:cNvSpPr>
-          <p:nvPr>
-            <p:ph type="ftr" sz="quarter" idx="11"/>
-          </p:nvPr>
-        </p:nvSpPr>
-        <p:spPr>
-          <a:xfrm>
-            <a:off x="4648200" y="6356353"/>
-            <a:ext cx="3204000" cy="365125"/>
-          </a:xfrm>
-        </p:spPr>
-        <p:txBody>
-          <a:bodyPr/>
-          <a:lstStyle/>
-          <a:p>
-            <a:pPr>
-              <a:defRPr/>
-            </a:pPr>
-            <a:r>
-              <a:rPr lang="en-US">
-                <a:solidFill>
-                  <a:schemeClr val="bg1"/>
-                </a:solidFill>
-              </a:rPr>
-              <a:t>@SIH Idea submission- Template</a:t>
-            </a:r>
-            <a:endParaRPr lang="en-US" dirty="0">
-              <a:solidFill>
-                <a:schemeClr val="bg1"/>
-              </a:solidFill>
-            </a:endParaRPr>
-          </a:p>
-        </p:txBody>
-      </p:sp>
-      <p:sp>
-        <p:nvSpPr>
-          <p:cNvPr id="10" name="Oval 9" descr="Your startup LOGO">
-            <a:extLst>
-              <a:ext uri="{FF2B5EF4-FFF2-40B4-BE49-F238E27FC236}">
-                <a16:creationId xmlns:a16="http://schemas.microsoft.com/office/drawing/2014/main" id="{5DBCE864-823D-4A13-9607-5DA1F0ED5FB8}"/>
-              </a:ext>
-              <a:ext uri="{C183D7F6-B498-43B3-948B-1728B52AA6E4}">
-                <adec:decorative xmlns:adec="http://schemas.microsoft.com/office/drawing/2017/decorative" xmlns="" val="0"/>
-              </a:ext>
-            </a:extLst>
-          </p:cNvPr>
-          <p:cNvSpPr/>
-          <p:nvPr/>
-        </p:nvSpPr>
-        <p:spPr>
-          <a:xfrm>
-            <a:off x="329773" y="252246"/>
-            <a:ext cx="1251857" cy="807334"/>
-          </a:xfrm>
-          <a:prstGeom prst="ellipse">
-            <a:avLst/>
-          </a:prstGeom>
-        </p:spPr>
-        <p:style>
-          <a:lnRef idx="2">
-            <a:schemeClr val="accent4"/>
-          </a:lnRef>
-          <a:fillRef idx="1">
-            <a:schemeClr val="lt1"/>
-          </a:fillRef>
-          <a:effectRef idx="0">
-            <a:schemeClr val="accent4"/>
-          </a:effectRef>
-          <a:fontRef idx="minor">
-            <a:schemeClr val="dk1"/>
-          </a:fontRef>
-        </p:style>
-        <p:txBody>
-          <a:bodyPr rtlCol="0" anchor="ctr"/>
-          <a:lstStyle/>
-          <a:p>
-            <a:pPr algn="ctr"/>
-            <a:r>
-              <a:rPr b="1" sz="950">
-                <a:solidFill>
-                  <a:srgbClr val="FFFFFF"/>
-                </a:solidFill>
-              </a:rPr>
-              <a:t>ByteForce_1
-</a:t>
-            </a:r>
-            <a:r>
-              <a:rPr sz="850">
-                <a:solidFill>
-                  <a:srgbClr val="E0F2FE"/>
-                </a:solidFill>
-              </a:rPr>
-              <a:t>(ID: 180219)</a:t>
-            </a:r>
-            <a:endParaRPr lang="en-IN" dirty="0"/>
-          </a:p>
-        </p:txBody>
-      </p:sp>
       <p:pic>
         <p:nvPicPr>
-          <p:cNvPr id="11" name="Picture 10"/>
-          <p:cNvPicPr>
-            <a:picLocks noChangeAspect="1"/>
-          </p:cNvPicPr>
-          <p:nvPr/>
-        </p:nvPicPr>
-        <p:blipFill>
-          <a:blip r:embed="rId3">
-            <a:extLst>
-              <a:ext uri="{28A0092B-C50C-407E-A947-70E740481C1C}">
-                <a14:useLocalDpi xmlns:a14="http://schemas.microsoft.com/office/drawing/2010/main" val="0"/>
-              </a:ext>
-            </a:extLst>
-          </a:blip>
-          <a:stretch>
-            <a:fillRect/>
-          </a:stretch>
-        </p:blipFill>
-        <p:spPr>
-          <a:xfrm>
-            <a:off x="9780086" y="1500"/>
-            <a:ext cx="2249850" cy="1062337"/>
-          </a:xfrm>
-          <a:prstGeom prst="rect">
-            <a:avLst/>
-          </a:prstGeom>
-        </p:spPr>
-      </p:pic>
-      <p:sp>
-        <p:nvSpPr>
-          <p:cNvPr id="15362" name="Rounded Rectangle 15361"/>
-          <p:cNvSpPr/>
-          <p:nvPr/>
-        </p:nvSpPr>
-        <p:spPr>
-          <a:xfrm>
-            <a:off x="502920" y="1234440"/>
-            <a:ext cx="3520440" cy="1234440"/>
-          </a:xfrm>
-          <a:prstGeom prst="roundRect">
-            <a:avLst/>
-          </a:prstGeom>
-          <a:solidFill>
-            <a:srgbClr val="0F172A"/>
-          </a:solidFill>
-          <a:ln w="19050">
-            <a:solidFill>
-              <a:srgbClr val="E11D48"/>
-            </a:solidFill>
-          </a:ln>
-        </p:spPr>
-        <p:style>
-          <a:lnRef idx="1">
-            <a:schemeClr val="accent1"/>
-          </a:lnRef>
-          <a:fillRef idx="3">
-            <a:schemeClr val="accent1"/>
-          </a:fillRef>
-          <a:effectRef idx="2">
-            <a:schemeClr val="accent1"/>
-          </a:effectRef>
-          <a:fontRef idx="minor">
-            <a:schemeClr val="lt1"/>
-          </a:fontRef>
-        </p:style>
-        <p:txBody>
-          <a:bodyPr rtlCol="0" anchor="ctr" wrap="square" lIns="137160" rIns="137160" tIns="91440"/>
-          <a:lstStyle/>
-          <a:p>
-            <a:pPr algn="ctr">
-              <a:spcAft>
-                <a:spcPts val="300"/>
-              </a:spcAft>
-              <a:defRPr b="1" sz="1050">
-                <a:solidFill>
-                  <a:srgbClr val="E11D48"/>
-                </a:solidFill>
-              </a:defRPr>
-            </a:pPr>
-            <a:r>
-              <a:t>Real-World Issue</a:t>
-            </a:r>
-          </a:p>
-          <a:p>
-            <a:pPr>
-              <a:defRPr sz="850">
-                <a:solidFill>
-                  <a:srgbClr val="F1F5F9"/>
-                </a:solidFill>
-              </a:defRPr>
-            </a:pPr>
-            <a:r>
-              <a:t>Enterprises rely on static, qualitative 'High/Medium/Low' heatmaps that hide actual financial exposure, leaving boards unable to justify cyber budgets against dynamic threats.</a:t>
-            </a:r>
-          </a:p>
-        </p:txBody>
-      </p:sp>
-      <p:sp>
-        <p:nvSpPr>
-          <p:cNvPr id="15363" name="Rounded Rectangle 15362"/>
-          <p:cNvSpPr/>
-          <p:nvPr/>
-        </p:nvSpPr>
-        <p:spPr>
-          <a:xfrm>
-            <a:off x="502920" y="2578608"/>
-            <a:ext cx="3520440" cy="1234440"/>
-          </a:xfrm>
-          <a:prstGeom prst="roundRect">
-            <a:avLst/>
-          </a:prstGeom>
-          <a:solidFill>
-            <a:srgbClr val="0F172A"/>
-          </a:solidFill>
-          <a:ln w="19050">
-            <a:solidFill>
-              <a:srgbClr val="0284C7"/>
-            </a:solidFill>
-          </a:ln>
-        </p:spPr>
-        <p:style>
-          <a:lnRef idx="1">
-            <a:schemeClr val="accent1"/>
-          </a:lnRef>
-          <a:fillRef idx="3">
-            <a:schemeClr val="accent1"/>
-          </a:fillRef>
-          <a:effectRef idx="2">
-            <a:schemeClr val="accent1"/>
-          </a:effectRef>
-          <a:fontRef idx="minor">
-            <a:schemeClr val="lt1"/>
-          </a:fontRef>
-        </p:style>
-        <p:txBody>
-          <a:bodyPr rtlCol="0" anchor="ctr" wrap="square" lIns="137160" rIns="137160" tIns="91440"/>
-          <a:lstStyle/>
-          <a:p>
-            <a:pPr algn="ctr">
-              <a:spcAft>
-                <a:spcPts val="300"/>
-              </a:spcAft>
-              <a:defRPr b="1" sz="1050">
-                <a:solidFill>
-                  <a:srgbClr val="0284C7"/>
-                </a:solidFill>
-              </a:defRPr>
-            </a:pPr>
-            <a:r>
-              <a:t>Why Important</a:t>
-            </a:r>
-          </a:p>
-          <a:p>
-            <a:pPr>
-              <a:defRPr sz="850">
-                <a:solidFill>
-                  <a:srgbClr val="F1F5F9"/>
-                </a:solidFill>
-              </a:defRPr>
-            </a:pPr>
-            <a:r>
-              <a:t>Cyber incidents cost Indian enterprises ₹25,000+ Cr annually. 68% of CISOs struggle to defend security ROI to boards without quantified financial risk metrics.</a:t>
-            </a:r>
-          </a:p>
-        </p:txBody>
-      </p:sp>
-      <p:sp>
-        <p:nvSpPr>
-          <p:cNvPr id="15364" name="Rounded Rectangle 15363"/>
-          <p:cNvSpPr/>
-          <p:nvPr/>
-        </p:nvSpPr>
-        <p:spPr>
-          <a:xfrm>
-            <a:off x="502920" y="3931920"/>
-            <a:ext cx="3520440" cy="1234440"/>
-          </a:xfrm>
-          <a:prstGeom prst="roundRect">
-            <a:avLst/>
-          </a:prstGeom>
-          <a:solidFill>
-            <a:srgbClr val="0F172A"/>
-          </a:solidFill>
-          <a:ln w="19050">
-            <a:solidFill>
-              <a:srgbClr val="10B981"/>
-            </a:solidFill>
-          </a:ln>
-        </p:spPr>
-        <p:style>
-          <a:lnRef idx="1">
-            <a:schemeClr val="accent1"/>
-          </a:lnRef>
-          <a:fillRef idx="3">
-            <a:schemeClr val="accent1"/>
-          </a:fillRef>
-          <a:effectRef idx="2">
-            <a:schemeClr val="accent1"/>
-          </a:effectRef>
-          <a:fontRef idx="minor">
-            <a:schemeClr val="lt1"/>
-          </a:fontRef>
-        </p:style>
-        <p:txBody>
-          <a:bodyPr rtlCol="0" anchor="ctr" wrap="square" lIns="137160" rIns="137160" tIns="91440"/>
-          <a:lstStyle/>
-          <a:p>
-            <a:pPr algn="ctr">
-              <a:spcAft>
-                <a:spcPts val="300"/>
-              </a:spcAft>
-              <a:defRPr b="1" sz="1050">
-                <a:solidFill>
-                  <a:srgbClr val="10B981"/>
-                </a:solidFill>
-              </a:defRPr>
-            </a:pPr>
-            <a:r>
-              <a:t>Proposed Solution: AURA Sentinel</a:t>
-            </a:r>
-          </a:p>
-          <a:p>
-            <a:pPr>
-              <a:defRPr sz="850">
-                <a:solidFill>
-                  <a:srgbClr val="F1F5F9"/>
-                </a:solidFill>
-              </a:defRPr>
-            </a:pPr>
-            <a:r>
-              <a:t>AI-powered continuous cyber risk quantification combining the Open Group FAIR standard, Monte Carlo simulation, 0/1 Knapsack optimization, and SHA-256 Merkle blockchain.</a:t>
-            </a:r>
-          </a:p>
-        </p:txBody>
-      </p:sp>
-      <p:sp>
-        <p:nvSpPr>
-          <p:cNvPr id="15365" name="Rounded Rectangle 15364"/>
-          <p:cNvSpPr/>
-          <p:nvPr/>
-        </p:nvSpPr>
-        <p:spPr>
-          <a:xfrm>
-            <a:off x="502920" y="5257800"/>
-            <a:ext cx="1124712" cy="347472"/>
-          </a:xfrm>
-          <a:prstGeom prst="roundRect">
-            <a:avLst/>
-          </a:prstGeom>
-          <a:solidFill>
-            <a:srgbClr val="1E293B"/>
-          </a:solidFill>
-          <a:ln w="12700">
-            <a:solidFill>
-              <a:srgbClr val="0284C7"/>
-            </a:solidFill>
-          </a:ln>
-        </p:spPr>
-        <p:style>
-          <a:lnRef idx="1">
-            <a:schemeClr val="accent1"/>
-          </a:lnRef>
-          <a:fillRef idx="3">
-            <a:schemeClr val="accent1"/>
-          </a:fillRef>
-          <a:effectRef idx="2">
-            <a:schemeClr val="accent1"/>
-          </a:effectRef>
-          <a:fontRef idx="minor">
-            <a:schemeClr val="lt1"/>
-          </a:fontRef>
-        </p:style>
-        <p:txBody>
-          <a:bodyPr rtlCol="0" anchor="ctr"/>
-          <a:lstStyle/>
-          <a:p>
-            <a:pPr algn="ctr">
-              <a:defRPr sz="750" b="1">
-                <a:solidFill>
-                  <a:srgbClr val="38BDF8"/>
-                </a:solidFill>
-              </a:defRPr>
-            </a:pPr>
-            <a:r>
-              <a:t>● Live SOC Console</a:t>
-            </a:r>
-          </a:p>
-        </p:txBody>
-      </p:sp>
-      <p:sp>
-        <p:nvSpPr>
-          <p:cNvPr id="15366" name="Rounded Rectangle 15365"/>
-          <p:cNvSpPr/>
-          <p:nvPr/>
-        </p:nvSpPr>
-        <p:spPr>
-          <a:xfrm>
-            <a:off x="1700784" y="5257800"/>
-            <a:ext cx="1124712" cy="347472"/>
-          </a:xfrm>
-          <a:prstGeom prst="roundRect">
-            <a:avLst/>
-          </a:prstGeom>
-          <a:solidFill>
-            <a:srgbClr val="1E293B"/>
-          </a:solidFill>
-          <a:ln w="12700">
-            <a:solidFill>
-              <a:srgbClr val="0284C7"/>
-            </a:solidFill>
-          </a:ln>
-        </p:spPr>
-        <p:style>
-          <a:lnRef idx="1">
-            <a:schemeClr val="accent1"/>
-          </a:lnRef>
-          <a:fillRef idx="3">
-            <a:schemeClr val="accent1"/>
-          </a:fillRef>
-          <a:effectRef idx="2">
-            <a:schemeClr val="accent1"/>
-          </a:effectRef>
-          <a:fontRef idx="minor">
-            <a:schemeClr val="lt1"/>
-          </a:fontRef>
-        </p:style>
-        <p:txBody>
-          <a:bodyPr rtlCol="0" anchor="ctr"/>
-          <a:lstStyle/>
-          <a:p>
-            <a:pPr algn="ctr">
-              <a:defRPr sz="750" b="1">
-                <a:solidFill>
-                  <a:srgbClr val="38BDF8"/>
-                </a:solidFill>
-              </a:defRPr>
-            </a:pPr>
-            <a:r>
-              <a:t>● GitHub Repo</a:t>
-            </a:r>
-          </a:p>
-        </p:txBody>
-      </p:sp>
-      <p:sp>
-        <p:nvSpPr>
-          <p:cNvPr id="15367" name="Rounded Rectangle 15366"/>
-          <p:cNvSpPr/>
-          <p:nvPr/>
-        </p:nvSpPr>
-        <p:spPr>
-          <a:xfrm>
-            <a:off x="2898648" y="5257800"/>
-            <a:ext cx="1124712" cy="347472"/>
-          </a:xfrm>
-          <a:prstGeom prst="roundRect">
-            <a:avLst/>
-          </a:prstGeom>
-          <a:solidFill>
-            <a:srgbClr val="1E293B"/>
-          </a:solidFill>
-          <a:ln w="12700">
-            <a:solidFill>
-              <a:srgbClr val="0284C7"/>
-            </a:solidFill>
-          </a:ln>
-        </p:spPr>
-        <p:style>
-          <a:lnRef idx="1">
-            <a:schemeClr val="accent1"/>
-          </a:lnRef>
-          <a:fillRef idx="3">
-            <a:schemeClr val="accent1"/>
-          </a:fillRef>
-          <a:effectRef idx="2">
-            <a:schemeClr val="accent1"/>
-          </a:effectRef>
-          <a:fontRef idx="minor">
-            <a:schemeClr val="lt1"/>
-          </a:fontRef>
-        </p:style>
-        <p:txBody>
-          <a:bodyPr rtlCol="0" anchor="ctr"/>
-          <a:lstStyle/>
-          <a:p>
-            <a:pPr algn="ctr">
-              <a:defRPr sz="750" b="1">
-                <a:solidFill>
-                  <a:srgbClr val="38BDF8"/>
-                </a:solidFill>
-              </a:defRPr>
-            </a:pPr>
-            <a:r>
-              <a:t>● REST API Docs</a:t>
-            </a:r>
-          </a:p>
-        </p:txBody>
-      </p:sp>
-      <p:pic>
-        <p:nvPicPr>
-          <p:cNvPr id="15368" name="Picture 15367" descr="slide2_pyramid.png"/>
+          <p:cNvPr id="2" name="Picture 1" descr="slide_2.png"/>
           <p:cNvPicPr>
             <a:picLocks noChangeAspect="1"/>
           </p:cNvPicPr>
@@ -5753,707 +4730,14 @@
         </p:blipFill>
         <p:spPr>
           <a:xfrm>
-            <a:off x="4160520" y="1188720"/>
-            <a:ext cx="3931920" cy="4434840"/>
+            <a:off x="0" y="0"/>
+            <a:ext cx="12191969" cy="6858000"/>
           </a:xfrm>
           <a:prstGeom prst="rect">
             <a:avLst/>
           </a:prstGeom>
         </p:spPr>
       </p:pic>
-      <p:sp>
-        <p:nvSpPr>
-          <p:cNvPr id="15369" name="Rounded Rectangle 15368"/>
-          <p:cNvSpPr/>
-          <p:nvPr/>
-        </p:nvSpPr>
-        <p:spPr>
-          <a:xfrm>
-            <a:off x="8183879" y="1234440"/>
-            <a:ext cx="3520440" cy="1234440"/>
-          </a:xfrm>
-          <a:prstGeom prst="roundRect">
-            <a:avLst/>
-          </a:prstGeom>
-          <a:solidFill>
-            <a:srgbClr val="F8FAFC"/>
-          </a:solidFill>
-          <a:ln w="12700">
-            <a:solidFill>
-              <a:srgbClr val="BAE6FD"/>
-            </a:solidFill>
-          </a:ln>
-        </p:spPr>
-        <p:style>
-          <a:lnRef idx="1">
-            <a:schemeClr val="accent1"/>
-          </a:lnRef>
-          <a:fillRef idx="3">
-            <a:schemeClr val="accent1"/>
-          </a:fillRef>
-          <a:effectRef idx="2">
-            <a:schemeClr val="accent1"/>
-          </a:effectRef>
-          <a:fontRef idx="minor">
-            <a:schemeClr val="lt1"/>
-          </a:fontRef>
-        </p:style>
-        <p:txBody>
-          <a:bodyPr rtlCol="0" anchor="ctr"/>
-          <a:lstStyle/>
-          <a:p>
-            <a:pPr algn="ctr"/>
-          </a:p>
-        </p:txBody>
-      </p:sp>
-      <p:sp>
-        <p:nvSpPr>
-          <p:cNvPr id="15370" name="Rounded Rectangle 15369"/>
-          <p:cNvSpPr/>
-          <p:nvPr/>
-        </p:nvSpPr>
-        <p:spPr>
-          <a:xfrm>
-            <a:off x="8275320" y="1289304"/>
-            <a:ext cx="3337560" cy="475488"/>
-          </a:xfrm>
-          <a:prstGeom prst="roundRect">
-            <a:avLst/>
-          </a:prstGeom>
-          <a:solidFill>
-            <a:srgbClr val="FEF2F2"/>
-          </a:solidFill>
-          <a:ln>
-            <a:solidFill>
-              <a:srgbClr val="FECACA"/>
-            </a:solidFill>
-          </a:ln>
-        </p:spPr>
-        <p:style>
-          <a:lnRef idx="1">
-            <a:schemeClr val="accent1"/>
-          </a:lnRef>
-          <a:fillRef idx="3">
-            <a:schemeClr val="accent1"/>
-          </a:fillRef>
-          <a:effectRef idx="2">
-            <a:schemeClr val="accent1"/>
-          </a:effectRef>
-          <a:fontRef idx="minor">
-            <a:schemeClr val="lt1"/>
-          </a:fontRef>
-        </p:style>
-        <p:txBody>
-          <a:bodyPr rtlCol="0" anchor="ctr" wrap="square" lIns="73152" tIns="36576"/>
-          <a:lstStyle/>
-          <a:p>
-            <a:pPr algn="ctr">
-              <a:defRPr b="1" sz="819">
-                <a:solidFill>
-                  <a:srgbClr val="E11D48"/>
-                </a:solidFill>
-              </a:defRPr>
-            </a:pPr>
-            <a:r>
-              <a:t>RISK: Static Annual Heatmaps</a:t>
-            </a:r>
-          </a:p>
-          <a:p>
-            <a:pPr>
-              <a:defRPr sz="700">
-                <a:solidFill>
-                  <a:srgbClr val="0F172A"/>
-                </a:solidFill>
-              </a:defRPr>
-            </a:pPr>
-            <a:r>
-              <a:t>Subjective High/Medium guesswork; stale within days; zero actuarial Rupee quantification.</a:t>
-            </a:r>
-          </a:p>
-        </p:txBody>
-      </p:sp>
-      <p:sp>
-        <p:nvSpPr>
-          <p:cNvPr id="15371" name="Oval 15370"/>
-          <p:cNvSpPr/>
-          <p:nvPr/>
-        </p:nvSpPr>
-        <p:spPr>
-          <a:xfrm>
-            <a:off x="9738360" y="1719072"/>
-            <a:ext cx="411480" cy="219456"/>
-          </a:xfrm>
-          <a:prstGeom prst="ellipse">
-            <a:avLst/>
-          </a:prstGeom>
-          <a:solidFill>
-            <a:srgbClr val="0F172A"/>
-          </a:solidFill>
-          <a:ln>
-            <a:solidFill>
-              <a:srgbClr val="0284C7"/>
-            </a:solidFill>
-          </a:ln>
-        </p:spPr>
-        <p:style>
-          <a:lnRef idx="1">
-            <a:schemeClr val="accent1"/>
-          </a:lnRef>
-          <a:fillRef idx="3">
-            <a:schemeClr val="accent1"/>
-          </a:fillRef>
-          <a:effectRef idx="2">
-            <a:schemeClr val="accent1"/>
-          </a:effectRef>
-          <a:fontRef idx="minor">
-            <a:schemeClr val="lt1"/>
-          </a:fontRef>
-        </p:style>
-        <p:txBody>
-          <a:bodyPr rtlCol="0" anchor="ctr"/>
-          <a:lstStyle/>
-          <a:p>
-            <a:pPr algn="ctr">
-              <a:defRPr sz="650" b="1">
-                <a:solidFill>
-                  <a:srgbClr val="FFFFFF"/>
-                </a:solidFill>
-              </a:defRPr>
-            </a:pPr>
-            <a:r>
-              <a:t>vs</a:t>
-            </a:r>
-          </a:p>
-        </p:txBody>
-      </p:sp>
-      <p:sp>
-        <p:nvSpPr>
-          <p:cNvPr id="15372" name="Rounded Rectangle 15371"/>
-          <p:cNvSpPr/>
-          <p:nvPr/>
-        </p:nvSpPr>
-        <p:spPr>
-          <a:xfrm>
-            <a:off x="8275320" y="1892808"/>
-            <a:ext cx="3337560" cy="502920"/>
-          </a:xfrm>
-          <a:prstGeom prst="roundRect">
-            <a:avLst/>
-          </a:prstGeom>
-          <a:solidFill>
-            <a:srgbClr val="F0FDF4"/>
-          </a:solidFill>
-          <a:ln>
-            <a:solidFill>
-              <a:srgbClr val="BBF7D0"/>
-            </a:solidFill>
-          </a:ln>
-        </p:spPr>
-        <p:style>
-          <a:lnRef idx="1">
-            <a:schemeClr val="accent1"/>
-          </a:lnRef>
-          <a:fillRef idx="3">
-            <a:schemeClr val="accent1"/>
-          </a:fillRef>
-          <a:effectRef idx="2">
-            <a:schemeClr val="accent1"/>
-          </a:effectRef>
-          <a:fontRef idx="minor">
-            <a:schemeClr val="lt1"/>
-          </a:fontRef>
-        </p:style>
-        <p:txBody>
-          <a:bodyPr rtlCol="0" anchor="ctr" wrap="square" lIns="73152" tIns="36576"/>
-          <a:lstStyle/>
-          <a:p>
-            <a:pPr algn="ctr">
-              <a:defRPr b="1" sz="819">
-                <a:solidFill>
-                  <a:srgbClr val="10B981"/>
-                </a:solidFill>
-              </a:defRPr>
-            </a:pPr>
-            <a:r>
-              <a:t>SOLUTION: Continuous FAIR Engine</a:t>
-            </a:r>
-          </a:p>
-          <a:p>
-            <a:pPr>
-              <a:defRPr sz="700">
-                <a:solidFill>
-                  <a:srgbClr val="0F172A"/>
-                </a:solidFill>
-              </a:defRPr>
-            </a:pPr>
-            <a:r>
-              <a:t>Automated continuous loss calculation (Threat Frequency × Loss Magnitude in ₹).</a:t>
-            </a:r>
-          </a:p>
-        </p:txBody>
-      </p:sp>
-      <p:sp>
-        <p:nvSpPr>
-          <p:cNvPr id="15373" name="Rounded Rectangle 15372"/>
-          <p:cNvSpPr/>
-          <p:nvPr/>
-        </p:nvSpPr>
-        <p:spPr>
-          <a:xfrm>
-            <a:off x="8183879" y="2578608"/>
-            <a:ext cx="3520440" cy="1234440"/>
-          </a:xfrm>
-          <a:prstGeom prst="roundRect">
-            <a:avLst/>
-          </a:prstGeom>
-          <a:solidFill>
-            <a:srgbClr val="F8FAFC"/>
-          </a:solidFill>
-          <a:ln w="12700">
-            <a:solidFill>
-              <a:srgbClr val="BAE6FD"/>
-            </a:solidFill>
-          </a:ln>
-        </p:spPr>
-        <p:style>
-          <a:lnRef idx="1">
-            <a:schemeClr val="accent1"/>
-          </a:lnRef>
-          <a:fillRef idx="3">
-            <a:schemeClr val="accent1"/>
-          </a:fillRef>
-          <a:effectRef idx="2">
-            <a:schemeClr val="accent1"/>
-          </a:effectRef>
-          <a:fontRef idx="minor">
-            <a:schemeClr val="lt1"/>
-          </a:fontRef>
-        </p:style>
-        <p:txBody>
-          <a:bodyPr rtlCol="0" anchor="ctr"/>
-          <a:lstStyle/>
-          <a:p>
-            <a:pPr algn="ctr"/>
-          </a:p>
-        </p:txBody>
-      </p:sp>
-      <p:sp>
-        <p:nvSpPr>
-          <p:cNvPr id="15374" name="Rounded Rectangle 15373"/>
-          <p:cNvSpPr/>
-          <p:nvPr/>
-        </p:nvSpPr>
-        <p:spPr>
-          <a:xfrm>
-            <a:off x="8275320" y="2633472"/>
-            <a:ext cx="3337560" cy="475488"/>
-          </a:xfrm>
-          <a:prstGeom prst="roundRect">
-            <a:avLst/>
-          </a:prstGeom>
-          <a:solidFill>
-            <a:srgbClr val="FEF2F2"/>
-          </a:solidFill>
-          <a:ln>
-            <a:solidFill>
-              <a:srgbClr val="FECACA"/>
-            </a:solidFill>
-          </a:ln>
-        </p:spPr>
-        <p:style>
-          <a:lnRef idx="1">
-            <a:schemeClr val="accent1"/>
-          </a:lnRef>
-          <a:fillRef idx="3">
-            <a:schemeClr val="accent1"/>
-          </a:fillRef>
-          <a:effectRef idx="2">
-            <a:schemeClr val="accent1"/>
-          </a:effectRef>
-          <a:fontRef idx="minor">
-            <a:schemeClr val="lt1"/>
-          </a:fontRef>
-        </p:style>
-        <p:txBody>
-          <a:bodyPr rtlCol="0" anchor="ctr" wrap="square" lIns="73152" tIns="36576"/>
-          <a:lstStyle/>
-          <a:p>
-            <a:pPr algn="ctr">
-              <a:defRPr b="1" sz="819">
-                <a:solidFill>
-                  <a:srgbClr val="E11D48"/>
-                </a:solidFill>
-              </a:defRPr>
-            </a:pPr>
-            <a:r>
-              <a:t>RISK: Arbitrary Budget Allocation</a:t>
-            </a:r>
-          </a:p>
-          <a:p>
-            <a:pPr>
-              <a:defRPr sz="700">
-                <a:solidFill>
-                  <a:srgbClr val="0F172A"/>
-                </a:solidFill>
-              </a:defRPr>
-            </a:pPr>
-            <a:r>
-              <a:t>Security budgets allocated via vendor hype &amp; panic; no mathematical ROI justification.</a:t>
-            </a:r>
-          </a:p>
-        </p:txBody>
-      </p:sp>
-      <p:sp>
-        <p:nvSpPr>
-          <p:cNvPr id="15375" name="Oval 15374"/>
-          <p:cNvSpPr/>
-          <p:nvPr/>
-        </p:nvSpPr>
-        <p:spPr>
-          <a:xfrm>
-            <a:off x="9738360" y="3063240"/>
-            <a:ext cx="411480" cy="219456"/>
-          </a:xfrm>
-          <a:prstGeom prst="ellipse">
-            <a:avLst/>
-          </a:prstGeom>
-          <a:solidFill>
-            <a:srgbClr val="0F172A"/>
-          </a:solidFill>
-          <a:ln>
-            <a:solidFill>
-              <a:srgbClr val="0284C7"/>
-            </a:solidFill>
-          </a:ln>
-        </p:spPr>
-        <p:style>
-          <a:lnRef idx="1">
-            <a:schemeClr val="accent1"/>
-          </a:lnRef>
-          <a:fillRef idx="3">
-            <a:schemeClr val="accent1"/>
-          </a:fillRef>
-          <a:effectRef idx="2">
-            <a:schemeClr val="accent1"/>
-          </a:effectRef>
-          <a:fontRef idx="minor">
-            <a:schemeClr val="lt1"/>
-          </a:fontRef>
-        </p:style>
-        <p:txBody>
-          <a:bodyPr rtlCol="0" anchor="ctr"/>
-          <a:lstStyle/>
-          <a:p>
-            <a:pPr algn="ctr">
-              <a:defRPr sz="650" b="1">
-                <a:solidFill>
-                  <a:srgbClr val="FFFFFF"/>
-                </a:solidFill>
-              </a:defRPr>
-            </a:pPr>
-            <a:r>
-              <a:t>vs</a:t>
-            </a:r>
-          </a:p>
-        </p:txBody>
-      </p:sp>
-      <p:sp>
-        <p:nvSpPr>
-          <p:cNvPr id="15376" name="Rounded Rectangle 15375"/>
-          <p:cNvSpPr/>
-          <p:nvPr/>
-        </p:nvSpPr>
-        <p:spPr>
-          <a:xfrm>
-            <a:off x="8275320" y="3236976"/>
-            <a:ext cx="3337560" cy="502920"/>
-          </a:xfrm>
-          <a:prstGeom prst="roundRect">
-            <a:avLst/>
-          </a:prstGeom>
-          <a:solidFill>
-            <a:srgbClr val="F0FDF4"/>
-          </a:solidFill>
-          <a:ln>
-            <a:solidFill>
-              <a:srgbClr val="BBF7D0"/>
-            </a:solidFill>
-          </a:ln>
-        </p:spPr>
-        <p:style>
-          <a:lnRef idx="1">
-            <a:schemeClr val="accent1"/>
-          </a:lnRef>
-          <a:fillRef idx="3">
-            <a:schemeClr val="accent1"/>
-          </a:fillRef>
-          <a:effectRef idx="2">
-            <a:schemeClr val="accent1"/>
-          </a:effectRef>
-          <a:fontRef idx="minor">
-            <a:schemeClr val="lt1"/>
-          </a:fontRef>
-        </p:style>
-        <p:txBody>
-          <a:bodyPr rtlCol="0" anchor="ctr" wrap="square" lIns="73152" tIns="36576"/>
-          <a:lstStyle/>
-          <a:p>
-            <a:pPr algn="ctr">
-              <a:defRPr b="1" sz="819">
-                <a:solidFill>
-                  <a:srgbClr val="10B981"/>
-                </a:solidFill>
-              </a:defRPr>
-            </a:pPr>
-            <a:r>
-              <a:t>SOLUTION: 0/1 Knapsack Optimizer</a:t>
-            </a:r>
-          </a:p>
-          <a:p>
-            <a:pPr>
-              <a:defRPr sz="700">
-                <a:solidFill>
-                  <a:srgbClr val="0F172A"/>
-                </a:solidFill>
-              </a:defRPr>
-            </a:pPr>
-            <a:r>
-              <a:t>Bounded dynamic programming maximizes risk reduction per Rupee invested.</a:t>
-            </a:r>
-          </a:p>
-        </p:txBody>
-      </p:sp>
-      <p:sp>
-        <p:nvSpPr>
-          <p:cNvPr id="15377" name="Rounded Rectangle 15376"/>
-          <p:cNvSpPr/>
-          <p:nvPr/>
-        </p:nvSpPr>
-        <p:spPr>
-          <a:xfrm>
-            <a:off x="8183879" y="3931920"/>
-            <a:ext cx="3520440" cy="1234440"/>
-          </a:xfrm>
-          <a:prstGeom prst="roundRect">
-            <a:avLst/>
-          </a:prstGeom>
-          <a:solidFill>
-            <a:srgbClr val="F8FAFC"/>
-          </a:solidFill>
-          <a:ln w="12700">
-            <a:solidFill>
-              <a:srgbClr val="BAE6FD"/>
-            </a:solidFill>
-          </a:ln>
-        </p:spPr>
-        <p:style>
-          <a:lnRef idx="1">
-            <a:schemeClr val="accent1"/>
-          </a:lnRef>
-          <a:fillRef idx="3">
-            <a:schemeClr val="accent1"/>
-          </a:fillRef>
-          <a:effectRef idx="2">
-            <a:schemeClr val="accent1"/>
-          </a:effectRef>
-          <a:fontRef idx="minor">
-            <a:schemeClr val="lt1"/>
-          </a:fontRef>
-        </p:style>
-        <p:txBody>
-          <a:bodyPr rtlCol="0" anchor="ctr"/>
-          <a:lstStyle/>
-          <a:p>
-            <a:pPr algn="ctr"/>
-          </a:p>
-        </p:txBody>
-      </p:sp>
-      <p:sp>
-        <p:nvSpPr>
-          <p:cNvPr id="15378" name="Rounded Rectangle 15377"/>
-          <p:cNvSpPr/>
-          <p:nvPr/>
-        </p:nvSpPr>
-        <p:spPr>
-          <a:xfrm>
-            <a:off x="8275320" y="3986784"/>
-            <a:ext cx="3337560" cy="475488"/>
-          </a:xfrm>
-          <a:prstGeom prst="roundRect">
-            <a:avLst/>
-          </a:prstGeom>
-          <a:solidFill>
-            <a:srgbClr val="FEF2F2"/>
-          </a:solidFill>
-          <a:ln>
-            <a:solidFill>
-              <a:srgbClr val="FECACA"/>
-            </a:solidFill>
-          </a:ln>
-        </p:spPr>
-        <p:style>
-          <a:lnRef idx="1">
-            <a:schemeClr val="accent1"/>
-          </a:lnRef>
-          <a:fillRef idx="3">
-            <a:schemeClr val="accent1"/>
-          </a:fillRef>
-          <a:effectRef idx="2">
-            <a:schemeClr val="accent1"/>
-          </a:effectRef>
-          <a:fontRef idx="minor">
-            <a:schemeClr val="lt1"/>
-          </a:fontRef>
-        </p:style>
-        <p:txBody>
-          <a:bodyPr rtlCol="0" anchor="ctr" wrap="square" lIns="73152" tIns="36576"/>
-          <a:lstStyle/>
-          <a:p>
-            <a:pPr algn="ctr">
-              <a:defRPr b="1" sz="819">
-                <a:solidFill>
-                  <a:srgbClr val="E11D48"/>
-                </a:solidFill>
-              </a:defRPr>
-            </a:pPr>
-            <a:r>
-              <a:t>RISK: Repudiable Audit Trails</a:t>
-            </a:r>
-          </a:p>
-          <a:p>
-            <a:pPr>
-              <a:defRPr sz="700">
-                <a:solidFill>
-                  <a:srgbClr val="0F172A"/>
-                </a:solidFill>
-              </a:defRPr>
-            </a:pPr>
-            <a:r>
-              <a:t>Editable database logs that fail rigorous regulatory scrutiny (DPDP &amp; CERT-In).</a:t>
-            </a:r>
-          </a:p>
-        </p:txBody>
-      </p:sp>
-      <p:sp>
-        <p:nvSpPr>
-          <p:cNvPr id="15379" name="Oval 15378"/>
-          <p:cNvSpPr/>
-          <p:nvPr/>
-        </p:nvSpPr>
-        <p:spPr>
-          <a:xfrm>
-            <a:off x="9738360" y="4416552"/>
-            <a:ext cx="411480" cy="219456"/>
-          </a:xfrm>
-          <a:prstGeom prst="ellipse">
-            <a:avLst/>
-          </a:prstGeom>
-          <a:solidFill>
-            <a:srgbClr val="0F172A"/>
-          </a:solidFill>
-          <a:ln>
-            <a:solidFill>
-              <a:srgbClr val="0284C7"/>
-            </a:solidFill>
-          </a:ln>
-        </p:spPr>
-        <p:style>
-          <a:lnRef idx="1">
-            <a:schemeClr val="accent1"/>
-          </a:lnRef>
-          <a:fillRef idx="3">
-            <a:schemeClr val="accent1"/>
-          </a:fillRef>
-          <a:effectRef idx="2">
-            <a:schemeClr val="accent1"/>
-          </a:effectRef>
-          <a:fontRef idx="minor">
-            <a:schemeClr val="lt1"/>
-          </a:fontRef>
-        </p:style>
-        <p:txBody>
-          <a:bodyPr rtlCol="0" anchor="ctr"/>
-          <a:lstStyle/>
-          <a:p>
-            <a:pPr algn="ctr">
-              <a:defRPr sz="650" b="1">
-                <a:solidFill>
-                  <a:srgbClr val="FFFFFF"/>
-                </a:solidFill>
-              </a:defRPr>
-            </a:pPr>
-            <a:r>
-              <a:t>vs</a:t>
-            </a:r>
-          </a:p>
-        </p:txBody>
-      </p:sp>
-      <p:sp>
-        <p:nvSpPr>
-          <p:cNvPr id="15380" name="Rounded Rectangle 15379"/>
-          <p:cNvSpPr/>
-          <p:nvPr/>
-        </p:nvSpPr>
-        <p:spPr>
-          <a:xfrm>
-            <a:off x="8275320" y="4590288"/>
-            <a:ext cx="3337560" cy="502920"/>
-          </a:xfrm>
-          <a:prstGeom prst="roundRect">
-            <a:avLst/>
-          </a:prstGeom>
-          <a:solidFill>
-            <a:srgbClr val="F0FDF4"/>
-          </a:solidFill>
-          <a:ln>
-            <a:solidFill>
-              <a:srgbClr val="BBF7D0"/>
-            </a:solidFill>
-          </a:ln>
-        </p:spPr>
-        <p:style>
-          <a:lnRef idx="1">
-            <a:schemeClr val="accent1"/>
-          </a:lnRef>
-          <a:fillRef idx="3">
-            <a:schemeClr val="accent1"/>
-          </a:fillRef>
-          <a:effectRef idx="2">
-            <a:schemeClr val="accent1"/>
-          </a:effectRef>
-          <a:fontRef idx="minor">
-            <a:schemeClr val="lt1"/>
-          </a:fontRef>
-        </p:style>
-        <p:txBody>
-          <a:bodyPr rtlCol="0" anchor="ctr" wrap="square" lIns="73152" tIns="36576"/>
-          <a:lstStyle/>
-          <a:p>
-            <a:pPr algn="ctr">
-              <a:defRPr b="1" sz="819">
-                <a:solidFill>
-                  <a:srgbClr val="10B981"/>
-                </a:solidFill>
-              </a:defRPr>
-            </a:pPr>
-            <a:r>
-              <a:t>SOLUTION: Merkle Blockchain Ledger</a:t>
-            </a:r>
-          </a:p>
-          <a:p>
-            <a:pPr>
-              <a:defRPr sz="700">
-                <a:solidFill>
-                  <a:srgbClr val="0F172A"/>
-                </a:solidFill>
-              </a:defRPr>
-            </a:pPr>
-            <a:r>
-              <a:t>Cryptographically sealed SHA-256 state anchoring for zero-trust compliance.</a:t>
-            </a:r>
-          </a:p>
-        </p:txBody>
-      </p:sp>
     </p:spTree>
   </p:cSld>
   <p:clrMapOvr>
@@ -6479,266 +4763,9 @@
           <a:chExt cx="0" cy="0"/>
         </a:xfrm>
       </p:grpSpPr>
-      <p:sp>
-        <p:nvSpPr>
-          <p:cNvPr id="10" name="Rectangle 9">
-            <a:extLst>
-              <a:ext uri="{FF2B5EF4-FFF2-40B4-BE49-F238E27FC236}">
-                <a16:creationId xmlns:a16="http://schemas.microsoft.com/office/drawing/2014/main" id="{AD4F69D3-EEB0-4C4C-9434-B9960FB5854C}"/>
-              </a:ext>
-            </a:extLst>
-          </p:cNvPr>
-          <p:cNvSpPr>
-            <a:spLocks noChangeArrowheads="1"/>
-          </p:cNvSpPr>
-          <p:nvPr/>
-        </p:nvSpPr>
-        <p:spPr bwMode="auto">
-          <a:xfrm>
-            <a:off x="0" y="6354762"/>
-            <a:ext cx="12191999" cy="503238"/>
-          </a:xfrm>
-          <a:prstGeom prst="rect">
-            <a:avLst/>
-          </a:prstGeom>
-          <a:solidFill>
-            <a:srgbClr val="0070C0"/>
-          </a:solidFill>
-          <a:ln w="9525">
-            <a:noFill/>
-            <a:miter lim="800000"/>
-            <a:headEnd/>
-            <a:tailEnd/>
-          </a:ln>
-          <a:effectLst>
-            <a:outerShdw dist="23000" dir="5400000" rotWithShape="0">
-              <a:srgbClr val="808080">
-                <a:alpha val="34999"/>
-              </a:srgbClr>
-            </a:outerShdw>
-          </a:effectLst>
-        </p:spPr>
-        <p:txBody>
-          <a:bodyPr anchor="ctr"/>
-          <a:lstStyle/>
-          <a:p>
-            <a:pPr algn="ctr" fontAlgn="auto">
-              <a:spcBef>
-                <a:spcPts val="0"/>
-              </a:spcBef>
-              <a:spcAft>
-                <a:spcPts val="0"/>
-              </a:spcAft>
-              <a:defRPr/>
-            </a:pPr>
-            <a:endParaRPr lang="en-US" dirty="0">
-              <a:solidFill>
-                <a:schemeClr val="accent2">
-                  <a:lumMod val="75000"/>
-                </a:schemeClr>
-              </a:solidFill>
-              <a:latin typeface="+mn-lt"/>
-              <a:ea typeface="+mn-ea"/>
-            </a:endParaRPr>
-          </a:p>
-        </p:txBody>
-      </p:sp>
-      <p:sp>
-        <p:nvSpPr>
-          <p:cNvPr id="17409" name="Title 1"/>
-          <p:cNvSpPr>
-            <a:spLocks noGrp="1"/>
-          </p:cNvSpPr>
-          <p:nvPr>
-            <p:ph type="title"/>
-          </p:nvPr>
-        </p:nvSpPr>
-        <p:spPr/>
-        <p:txBody>
-          <a:bodyPr/>
-          <a:lstStyle/>
-          <a:p>
-            <a:pPr>
-              <a:defRPr sz="2000" b="1">
-                <a:solidFill>
-                  <a:srgbClr val="0F172A"/>
-                </a:solidFill>
-              </a:defRPr>
-            </a:pPr>
-            <a:r>
-              <a:t>TECHNICAL APPROACH &amp; SYSTEM ARCHITECTURE</a:t>
-            </a:r>
-          </a:p>
-        </p:txBody>
-      </p:sp>
-      <p:sp>
-        <p:nvSpPr>
-          <p:cNvPr id="6" name="Slide Number Placeholder 5"/>
-          <p:cNvSpPr>
-            <a:spLocks noGrp="1"/>
-          </p:cNvSpPr>
-          <p:nvPr>
-            <p:ph type="sldNum" sz="quarter" idx="12"/>
-          </p:nvPr>
-        </p:nvSpPr>
-        <p:spPr/>
-        <p:txBody>
-          <a:bodyPr/>
-          <a:lstStyle/>
-          <a:p>
-            <a:fld id="{677C3CE7-23F7-4828-823C-E0205DF2CF97}" type="slidenum">
-              <a:rPr lang="en-US" b="1">
-                <a:solidFill>
-                  <a:schemeClr val="bg1"/>
-                </a:solidFill>
-              </a:rPr>
-              <a:pPr/>
-              <a:t>3</a:t>
-            </a:fld>
-            <a:endParaRPr lang="en-US" b="1" dirty="0">
-              <a:solidFill>
-                <a:schemeClr val="bg1"/>
-              </a:solidFill>
-            </a:endParaRPr>
-          </a:p>
-        </p:txBody>
-      </p:sp>
-      <p:sp>
-        <p:nvSpPr>
-          <p:cNvPr id="7" name="Footer Placeholder 6"/>
-          <p:cNvSpPr>
-            <a:spLocks noGrp="1"/>
-          </p:cNvSpPr>
-          <p:nvPr>
-            <p:ph type="ftr" sz="quarter" idx="11"/>
-          </p:nvPr>
-        </p:nvSpPr>
-        <p:spPr>
-          <a:xfrm>
-            <a:off x="4648200" y="6356353"/>
-            <a:ext cx="3204000" cy="365125"/>
-          </a:xfrm>
-        </p:spPr>
-        <p:txBody>
-          <a:bodyPr/>
-          <a:lstStyle/>
-          <a:p>
-            <a:pPr>
-              <a:defRPr/>
-            </a:pPr>
-            <a:r>
-              <a:rPr lang="en-US">
-                <a:solidFill>
-                  <a:schemeClr val="bg1"/>
-                </a:solidFill>
-              </a:rPr>
-              <a:t>@SIH Idea submission- Template</a:t>
-            </a:r>
-            <a:endParaRPr lang="en-US" dirty="0">
-              <a:solidFill>
-                <a:schemeClr val="bg1"/>
-              </a:solidFill>
-            </a:endParaRPr>
-          </a:p>
-        </p:txBody>
-      </p:sp>
-      <p:sp>
-        <p:nvSpPr>
-          <p:cNvPr id="11" name="Oval 10" descr="Your startup LOGO">
-            <a:extLst>
-              <a:ext uri="{FF2B5EF4-FFF2-40B4-BE49-F238E27FC236}">
-                <a16:creationId xmlns:a16="http://schemas.microsoft.com/office/drawing/2014/main" id="{5DBCE864-823D-4A13-9607-5DA1F0ED5FB8}"/>
-              </a:ext>
-              <a:ext uri="{C183D7F6-B498-43B3-948B-1728B52AA6E4}">
-                <adec:decorative xmlns:adec="http://schemas.microsoft.com/office/drawing/2017/decorative" xmlns="" val="0"/>
-              </a:ext>
-            </a:extLst>
-          </p:cNvPr>
-          <p:cNvSpPr/>
-          <p:nvPr/>
-        </p:nvSpPr>
-        <p:spPr>
-          <a:xfrm>
-            <a:off x="329773" y="252246"/>
-            <a:ext cx="1251857" cy="807334"/>
-          </a:xfrm>
-          <a:prstGeom prst="ellipse">
-            <a:avLst/>
-          </a:prstGeom>
-        </p:spPr>
-        <p:style>
-          <a:lnRef idx="2">
-            <a:schemeClr val="accent4"/>
-          </a:lnRef>
-          <a:fillRef idx="1">
-            <a:schemeClr val="lt1"/>
-          </a:fillRef>
-          <a:effectRef idx="0">
-            <a:schemeClr val="accent4"/>
-          </a:effectRef>
-          <a:fontRef idx="minor">
-            <a:schemeClr val="dk1"/>
-          </a:fontRef>
-        </p:style>
-        <p:txBody>
-          <a:bodyPr rtlCol="0" anchor="ctr"/>
-          <a:lstStyle/>
-          <a:p>
-            <a:pPr algn="ctr"/>
-            <a:r>
-              <a:rPr b="1" sz="950">
-                <a:solidFill>
-                  <a:srgbClr val="FFFFFF"/>
-                </a:solidFill>
-              </a:rPr>
-              <a:t>ByteForce_1
-</a:t>
-            </a:r>
-            <a:r>
-              <a:rPr sz="850">
-                <a:solidFill>
-                  <a:srgbClr val="E0F2FE"/>
-                </a:solidFill>
-              </a:rPr>
-              <a:t>(ID: 180219)</a:t>
-            </a:r>
-            <a:endParaRPr lang="en-IN" dirty="0"/>
-          </a:p>
-        </p:txBody>
-      </p:sp>
       <p:pic>
         <p:nvPicPr>
-          <p:cNvPr id="12" name="Picture 11"/>
-          <p:cNvPicPr>
-            <a:picLocks noChangeAspect="1"/>
-          </p:cNvPicPr>
-          <p:nvPr/>
-        </p:nvPicPr>
-        <p:blipFill>
-          <a:blip r:embed="rId3">
-            <a:extLst>
-              <a:ext uri="{28A0092B-C50C-407E-A947-70E740481C1C}">
-                <a14:useLocalDpi xmlns:a14="http://schemas.microsoft.com/office/drawing/2010/main" val="0"/>
-              </a:ext>
-            </a:extLst>
-          </a:blip>
-          <a:stretch>
-            <a:fillRect/>
-          </a:stretch>
-        </p:blipFill>
-        <p:spPr>
-          <a:xfrm>
-            <a:off x="9780086" y="1500"/>
-            <a:ext cx="2249850" cy="1062337"/>
-          </a:xfrm>
-          <a:prstGeom prst="rect">
-            <a:avLst/>
-          </a:prstGeom>
-        </p:spPr>
-      </p:pic>
-      <p:pic>
-        <p:nvPicPr>
-          <p:cNvPr id="17410" name="Picture 17409" descr="slide3_circular_flow.png"/>
+          <p:cNvPr id="2" name="Picture 1" descr="slide_3.png"/>
           <p:cNvPicPr>
             <a:picLocks noChangeAspect="1"/>
           </p:cNvPicPr>
@@ -6752,353 +4779,14 @@
         </p:blipFill>
         <p:spPr>
           <a:xfrm>
-            <a:off x="502920" y="1188720"/>
-            <a:ext cx="3749039" cy="3931920"/>
+            <a:off x="0" y="0"/>
+            <a:ext cx="12191969" cy="6858000"/>
           </a:xfrm>
           <a:prstGeom prst="rect">
             <a:avLst/>
           </a:prstGeom>
         </p:spPr>
       </p:pic>
-      <p:sp>
-        <p:nvSpPr>
-          <p:cNvPr id="17411" name="Rounded Rectangle 17410"/>
-          <p:cNvSpPr/>
-          <p:nvPr/>
-        </p:nvSpPr>
-        <p:spPr>
-          <a:xfrm>
-            <a:off x="594360" y="5230368"/>
-            <a:ext cx="1691640" cy="347472"/>
-          </a:xfrm>
-          <a:prstGeom prst="roundRect">
-            <a:avLst/>
-          </a:prstGeom>
-          <a:solidFill>
-            <a:srgbClr val="0F172A"/>
-          </a:solidFill>
-          <a:ln>
-            <a:solidFill>
-              <a:srgbClr val="0284C7"/>
-            </a:solidFill>
-          </a:ln>
-        </p:spPr>
-        <p:style>
-          <a:lnRef idx="1">
-            <a:schemeClr val="accent1"/>
-          </a:lnRef>
-          <a:fillRef idx="3">
-            <a:schemeClr val="accent1"/>
-          </a:fillRef>
-          <a:effectRef idx="2">
-            <a:schemeClr val="accent1"/>
-          </a:effectRef>
-          <a:fontRef idx="minor">
-            <a:schemeClr val="lt1"/>
-          </a:fontRef>
-        </p:style>
-        <p:txBody>
-          <a:bodyPr rtlCol="0" anchor="ctr"/>
-          <a:lstStyle/>
-          <a:p>
-            <a:pPr algn="ctr">
-              <a:defRPr sz="800" b="1">
-                <a:solidFill>
-                  <a:srgbClr val="FFFFFF"/>
-                </a:solidFill>
-              </a:defRPr>
-            </a:pPr>
-            <a:r>
-              <a:t>● Lifecycle Specification</a:t>
-            </a:r>
-          </a:p>
-        </p:txBody>
-      </p:sp>
-      <p:sp>
-        <p:nvSpPr>
-          <p:cNvPr id="17412" name="Rounded Rectangle 17411"/>
-          <p:cNvSpPr/>
-          <p:nvPr/>
-        </p:nvSpPr>
-        <p:spPr>
-          <a:xfrm>
-            <a:off x="2423160" y="5230368"/>
-            <a:ext cx="1691640" cy="347472"/>
-          </a:xfrm>
-          <a:prstGeom prst="roundRect">
-            <a:avLst/>
-          </a:prstGeom>
-          <a:solidFill>
-            <a:srgbClr val="0F172A"/>
-          </a:solidFill>
-          <a:ln>
-            <a:solidFill>
-              <a:srgbClr val="0284C7"/>
-            </a:solidFill>
-          </a:ln>
-        </p:spPr>
-        <p:style>
-          <a:lnRef idx="1">
-            <a:schemeClr val="accent1"/>
-          </a:lnRef>
-          <a:fillRef idx="3">
-            <a:schemeClr val="accent1"/>
-          </a:fillRef>
-          <a:effectRef idx="2">
-            <a:schemeClr val="accent1"/>
-          </a:effectRef>
-          <a:fontRef idx="minor">
-            <a:schemeClr val="lt1"/>
-          </a:fontRef>
-        </p:style>
-        <p:txBody>
-          <a:bodyPr rtlCol="0" anchor="ctr"/>
-          <a:lstStyle/>
-          <a:p>
-            <a:pPr algn="ctr">
-              <a:defRPr sz="800" b="1">
-                <a:solidFill>
-                  <a:srgbClr val="FFFFFF"/>
-                </a:solidFill>
-              </a:defRPr>
-            </a:pPr>
-            <a:r>
-              <a:t>● Algorithm Proofs</a:t>
-            </a:r>
-          </a:p>
-        </p:txBody>
-      </p:sp>
-      <p:pic>
-        <p:nvPicPr>
-          <p:cNvPr id="17413" name="Picture 17412" descr="slide3_architecture.png"/>
-          <p:cNvPicPr>
-            <a:picLocks noChangeAspect="1"/>
-          </p:cNvPicPr>
-          <p:nvPr/>
-        </p:nvPicPr>
-        <p:blipFill>
-          <a:blip r:embed="rId5"/>
-          <a:stretch>
-            <a:fillRect/>
-          </a:stretch>
-        </p:blipFill>
-        <p:spPr>
-          <a:xfrm>
-            <a:off x="4389120" y="1188720"/>
-            <a:ext cx="4023360" cy="4389120"/>
-          </a:xfrm>
-          <a:prstGeom prst="rect">
-            <a:avLst/>
-          </a:prstGeom>
-        </p:spPr>
-      </p:pic>
-      <p:sp>
-        <p:nvSpPr>
-          <p:cNvPr id="17414" name="Rounded Rectangle 17413"/>
-          <p:cNvSpPr/>
-          <p:nvPr/>
-        </p:nvSpPr>
-        <p:spPr>
-          <a:xfrm>
-            <a:off x="8549640" y="1188720"/>
-            <a:ext cx="3154680" cy="4389120"/>
-          </a:xfrm>
-          <a:prstGeom prst="roundRect">
-            <a:avLst/>
-          </a:prstGeom>
-          <a:solidFill>
-            <a:srgbClr val="F8FAFC"/>
-          </a:solidFill>
-          <a:ln>
-            <a:solidFill>
-              <a:srgbClr val="BAE6FD"/>
-            </a:solidFill>
-          </a:ln>
-        </p:spPr>
-        <p:style>
-          <a:lnRef idx="1">
-            <a:schemeClr val="accent1"/>
-          </a:lnRef>
-          <a:fillRef idx="3">
-            <a:schemeClr val="accent1"/>
-          </a:fillRef>
-          <a:effectRef idx="2">
-            <a:schemeClr val="accent1"/>
-          </a:effectRef>
-          <a:fontRef idx="minor">
-            <a:schemeClr val="lt1"/>
-          </a:fontRef>
-        </p:style>
-        <p:txBody>
-          <a:bodyPr rtlCol="0" anchor="ctr" wrap="square" lIns="128016" rIns="128016" tIns="109728"/>
-          <a:lstStyle/>
-          <a:p>
-            <a:pPr algn="ctr">
-              <a:spcAft>
-                <a:spcPts val="600"/>
-              </a:spcAft>
-              <a:defRPr b="1" sz="1100">
-                <a:solidFill>
-                  <a:srgbClr val="0F172A"/>
-                </a:solidFill>
-              </a:defRPr>
-            </a:pPr>
-            <a:r>
-              <a:t>TECHNOLOGIES USED</a:t>
-            </a:r>
-          </a:p>
-          <a:p>
-            <a:pPr>
-              <a:spcAft>
-                <a:spcPts val="100"/>
-              </a:spcAft>
-              <a:defRPr b="1" sz="850">
-                <a:solidFill>
-                  <a:srgbClr val="0284C7"/>
-                </a:solidFill>
-              </a:defRPr>
-            </a:pPr>
-            <a:r>
-              <a:t>▪ Backend &amp; APIs:</a:t>
-            </a:r>
-          </a:p>
-          <a:p>
-            <a:pPr>
-              <a:spcAft>
-                <a:spcPts val="400"/>
-              </a:spcAft>
-              <a:defRPr sz="800">
-                <a:solidFill>
-                  <a:srgbClr val="0F172A"/>
-                </a:solidFill>
-              </a:defRPr>
-            </a:pPr>
-            <a:r>
-              <a:t>Python 3.10, FastAPI, Pydantic, Uvicorn, SQLite 3</a:t>
-            </a:r>
-          </a:p>
-          <a:p>
-            <a:pPr>
-              <a:spcAft>
-                <a:spcPts val="100"/>
-              </a:spcAft>
-              <a:defRPr b="1" sz="850">
-                <a:solidFill>
-                  <a:srgbClr val="0F766E"/>
-                </a:solidFill>
-              </a:defRPr>
-            </a:pPr>
-            <a:r>
-              <a:t>▪ Quantification Engine:</a:t>
-            </a:r>
-          </a:p>
-          <a:p>
-            <a:pPr>
-              <a:spcAft>
-                <a:spcPts val="400"/>
-              </a:spcAft>
-              <a:defRPr sz="800">
-                <a:solidFill>
-                  <a:srgbClr val="0F172A"/>
-                </a:solidFill>
-              </a:defRPr>
-            </a:pPr>
-            <a:r>
-              <a:t>Open Group FAIR (O-RT), NumPy, Monte Carlo (10k)</a:t>
-            </a:r>
-          </a:p>
-          <a:p>
-            <a:pPr>
-              <a:spcAft>
-                <a:spcPts val="100"/>
-              </a:spcAft>
-              <a:defRPr b="1" sz="850">
-                <a:solidFill>
-                  <a:srgbClr val="D97706"/>
-                </a:solidFill>
-              </a:defRPr>
-            </a:pPr>
-            <a:r>
-              <a:t>▪ Optimization Logic:</a:t>
-            </a:r>
-          </a:p>
-          <a:p>
-            <a:pPr>
-              <a:spcAft>
-                <a:spcPts val="400"/>
-              </a:spcAft>
-              <a:defRPr sz="800">
-                <a:solidFill>
-                  <a:srgbClr val="0F172A"/>
-                </a:solidFill>
-              </a:defRPr>
-            </a:pPr>
-            <a:r>
-              <a:t>0/1 Knapsack (Dynamic Programming), Multi-Constraint</a:t>
-            </a:r>
-          </a:p>
-          <a:p>
-            <a:pPr>
-              <a:spcAft>
-                <a:spcPts val="100"/>
-              </a:spcAft>
-              <a:defRPr b="1" sz="850">
-                <a:solidFill>
-                  <a:srgbClr val="7C3AED"/>
-                </a:solidFill>
-              </a:defRPr>
-            </a:pPr>
-            <a:r>
-              <a:t>▪ Blockchain &amp; Audit:</a:t>
-            </a:r>
-          </a:p>
-          <a:p>
-            <a:pPr>
-              <a:spcAft>
-                <a:spcPts val="400"/>
-              </a:spcAft>
-              <a:defRPr sz="800">
-                <a:solidFill>
-                  <a:srgbClr val="0F172A"/>
-                </a:solidFill>
-              </a:defRPr>
-            </a:pPr>
-            <a:r>
-              <a:t>SHA-256 Merkle Tree, Cryptographic Hash Chain</a:t>
-            </a:r>
-          </a:p>
-          <a:p>
-            <a:pPr>
-              <a:spcAft>
-                <a:spcPts val="100"/>
-              </a:spcAft>
-              <a:defRPr b="1" sz="850">
-                <a:solidFill>
-                  <a:srgbClr val="2563EB"/>
-                </a:solidFill>
-              </a:defRPr>
-            </a:pPr>
-            <a:r>
-              <a:t>▪ Frontend &amp; SOC UI:</a:t>
-            </a:r>
-          </a:p>
-          <a:p>
-            <a:pPr>
-              <a:spcAft>
-                <a:spcPts val="400"/>
-              </a:spcAft>
-              <a:defRPr sz="800">
-                <a:solidFill>
-                  <a:srgbClr val="0F172A"/>
-                </a:solidFill>
-              </a:defRPr>
-            </a:pPr>
-            <a:r>
-              <a:t>React 18, Tailwind CSS, Lucide Icons, Recharts</a:t>
-            </a:r>
-          </a:p>
-        </p:txBody>
-      </p:sp>
     </p:spTree>
   </p:cSld>
   <p:clrMapOvr>
@@ -7124,1087 +4812,30 @@
           <a:chExt cx="0" cy="0"/>
         </a:xfrm>
       </p:grpSpPr>
-      <p:sp>
-        <p:nvSpPr>
-          <p:cNvPr id="10" name="Rectangle 9">
-            <a:extLst>
-              <a:ext uri="{FF2B5EF4-FFF2-40B4-BE49-F238E27FC236}">
-                <a16:creationId xmlns:a16="http://schemas.microsoft.com/office/drawing/2014/main" id="{AD4F69D3-EEB0-4C4C-9434-B9960FB5854C}"/>
-              </a:ext>
-            </a:extLst>
-          </p:cNvPr>
-          <p:cNvSpPr>
-            <a:spLocks noChangeArrowheads="1"/>
-          </p:cNvSpPr>
-          <p:nvPr/>
-        </p:nvSpPr>
-        <p:spPr bwMode="auto">
-          <a:xfrm>
-            <a:off x="0" y="6354762"/>
-            <a:ext cx="12191999" cy="503238"/>
-          </a:xfrm>
-          <a:prstGeom prst="rect">
-            <a:avLst/>
-          </a:prstGeom>
-          <a:solidFill>
-            <a:srgbClr val="0070C0"/>
-          </a:solidFill>
-          <a:ln w="9525">
-            <a:noFill/>
-            <a:miter lim="800000"/>
-            <a:headEnd/>
-            <a:tailEnd/>
-          </a:ln>
-          <a:effectLst>
-            <a:outerShdw dist="23000" dir="5400000" rotWithShape="0">
-              <a:srgbClr val="808080">
-                <a:alpha val="34999"/>
-              </a:srgbClr>
-            </a:outerShdw>
-          </a:effectLst>
-        </p:spPr>
-        <p:txBody>
-          <a:bodyPr anchor="ctr"/>
-          <a:lstStyle/>
-          <a:p>
-            <a:pPr marL="0" marR="0" lvl="0" indent="0" algn="ctr" defTabSz="457200" rtl="0" eaLnBrk="1" fontAlgn="auto" latinLnBrk="0" hangingPunct="1">
-              <a:lnSpc>
-                <a:spcPct val="100000"/>
-              </a:lnSpc>
-              <a:spcBef>
-                <a:spcPts val="0"/>
-              </a:spcBef>
-              <a:spcAft>
-                <a:spcPts val="0"/>
-              </a:spcAft>
-              <a:buClrTx/>
-              <a:buSzTx/>
-              <a:buFontTx/>
-              <a:buNone/>
-              <a:tabLst/>
-              <a:defRPr/>
-            </a:pPr>
-            <a:endParaRPr kumimoji="0" lang="en-US" sz="1800" b="0" i="0" u="none" strike="noStrike" kern="1200" cap="none" spc="0" normalizeH="0" baseline="0" noProof="0" dirty="0">
-              <a:ln>
-                <a:noFill/>
-              </a:ln>
-              <a:solidFill>
-                <a:srgbClr val="C0504D">
-                  <a:lumMod val="75000"/>
-                </a:srgbClr>
-              </a:solidFill>
-              <a:effectLst/>
-              <a:uLnTx/>
-              <a:uFillTx/>
-              <a:latin typeface="Calibri"/>
-              <a:ea typeface="ＭＳ Ｐゴシック" pitchFamily="1" charset="-128"/>
-              <a:cs typeface="+mn-cs"/>
-            </a:endParaRPr>
-          </a:p>
-        </p:txBody>
-      </p:sp>
-      <p:sp>
-        <p:nvSpPr>
-          <p:cNvPr id="17409" name="Title 1"/>
-          <p:cNvSpPr>
-            <a:spLocks noGrp="1"/>
-          </p:cNvSpPr>
-          <p:nvPr>
-            <p:ph type="title"/>
-          </p:nvPr>
-        </p:nvSpPr>
-        <p:spPr/>
-        <p:txBody>
-          <a:bodyPr/>
-          <a:lstStyle/>
-          <a:p>
-            <a:pPr>
-              <a:defRPr sz="2000" b="1">
-                <a:solidFill>
-                  <a:srgbClr val="0F172A"/>
-                </a:solidFill>
-              </a:defRPr>
-            </a:pPr>
-            <a:r>
-              <a:t>FEASIBILITY, VIABILITY &amp; BUSINESS POTENTIAL</a:t>
-            </a:r>
-          </a:p>
-        </p:txBody>
-      </p:sp>
-      <p:sp>
-        <p:nvSpPr>
-          <p:cNvPr id="6" name="Slide Number Placeholder 5"/>
-          <p:cNvSpPr>
-            <a:spLocks noGrp="1"/>
-          </p:cNvSpPr>
-          <p:nvPr>
-            <p:ph type="sldNum" sz="quarter" idx="12"/>
-          </p:nvPr>
-        </p:nvSpPr>
-        <p:spPr/>
-        <p:txBody>
-          <a:bodyPr/>
-          <a:lstStyle/>
-          <a:p>
-            <a:pPr marL="0" marR="0" lvl="0" indent="0" algn="r" defTabSz="457200" rtl="0" eaLnBrk="1" fontAlgn="base" latinLnBrk="0" hangingPunct="1">
-              <a:lnSpc>
-                <a:spcPct val="100000"/>
-              </a:lnSpc>
-              <a:spcBef>
-                <a:spcPct val="0"/>
-              </a:spcBef>
-              <a:spcAft>
-                <a:spcPct val="0"/>
-              </a:spcAft>
-              <a:buClrTx/>
-              <a:buSzTx/>
-              <a:buFontTx/>
-              <a:buNone/>
-              <a:tabLst/>
-              <a:defRPr/>
-            </a:pPr>
-            <a:fld id="{677C3CE7-23F7-4828-823C-E0205DF2CF97}" type="slidenum">
-              <a:rPr kumimoji="0" lang="en-US" sz="1200" b="1" i="0" u="none" strike="noStrike" kern="1200" cap="none" spc="0" normalizeH="0" baseline="0" noProof="0">
-                <a:ln>
-                  <a:noFill/>
-                </a:ln>
-                <a:solidFill>
-                  <a:prstClr val="white"/>
-                </a:solidFill>
-                <a:effectLst/>
-                <a:uLnTx/>
-                <a:uFillTx/>
-                <a:latin typeface="TradeGothic" pitchFamily="1" charset="0"/>
-                <a:ea typeface="ＭＳ Ｐゴシック" pitchFamily="1" charset="-128"/>
-                <a:cs typeface="+mn-cs"/>
-              </a:rPr>
-              <a:pPr marL="0" marR="0" lvl="0" indent="0" algn="r" defTabSz="457200" rtl="0" eaLnBrk="1" fontAlgn="base" latinLnBrk="0" hangingPunct="1">
-                <a:lnSpc>
-                  <a:spcPct val="100000"/>
-                </a:lnSpc>
-                <a:spcBef>
-                  <a:spcPct val="0"/>
-                </a:spcBef>
-                <a:spcAft>
-                  <a:spcPct val="0"/>
-                </a:spcAft>
-                <a:buClrTx/>
-                <a:buSzTx/>
-                <a:buFontTx/>
-                <a:buNone/>
-                <a:tabLst/>
-                <a:defRPr/>
-              </a:pPr>
-              <a:t>4</a:t>
-            </a:fld>
-            <a:endParaRPr kumimoji="0" lang="en-US" sz="1200" b="1" i="0" u="none" strike="noStrike" kern="1200" cap="none" spc="0" normalizeH="0" baseline="0" noProof="0" dirty="0">
-              <a:ln>
-                <a:noFill/>
-              </a:ln>
-              <a:solidFill>
-                <a:prstClr val="white"/>
-              </a:solidFill>
-              <a:effectLst/>
-              <a:uLnTx/>
-              <a:uFillTx/>
-              <a:latin typeface="TradeGothic" pitchFamily="1" charset="0"/>
-              <a:ea typeface="ＭＳ Ｐゴシック" pitchFamily="1" charset="-128"/>
-              <a:cs typeface="+mn-cs"/>
-            </a:endParaRPr>
-          </a:p>
-        </p:txBody>
-      </p:sp>
-      <p:sp>
-        <p:nvSpPr>
-          <p:cNvPr id="7" name="Footer Placeholder 6"/>
-          <p:cNvSpPr>
-            <a:spLocks noGrp="1"/>
-          </p:cNvSpPr>
-          <p:nvPr>
-            <p:ph type="ftr" sz="quarter" idx="11"/>
-          </p:nvPr>
-        </p:nvSpPr>
-        <p:spPr>
-          <a:xfrm>
-            <a:off x="4648200" y="6356353"/>
-            <a:ext cx="3204000" cy="365125"/>
-          </a:xfrm>
-        </p:spPr>
-        <p:txBody>
-          <a:bodyPr/>
-          <a:lstStyle/>
-          <a:p>
-            <a:pPr marL="0" marR="0" lvl="0" indent="0" algn="ctr" defTabSz="457200" rtl="0" eaLnBrk="1" fontAlgn="auto" latinLnBrk="0" hangingPunct="1">
-              <a:lnSpc>
-                <a:spcPct val="100000"/>
-              </a:lnSpc>
-              <a:spcBef>
-                <a:spcPts val="0"/>
-              </a:spcBef>
-              <a:spcAft>
-                <a:spcPts val="0"/>
-              </a:spcAft>
-              <a:buClrTx/>
-              <a:buSzTx/>
-              <a:buFontTx/>
-              <a:buNone/>
-              <a:tabLst/>
-              <a:defRPr/>
-            </a:pPr>
-            <a:r>
-              <a:rPr kumimoji="0" lang="en-US" sz="1200" b="0" i="0" u="none" strike="noStrike" kern="1200" cap="none" spc="0" normalizeH="0" baseline="0" noProof="0">
-                <a:ln>
-                  <a:noFill/>
-                </a:ln>
-                <a:solidFill>
-                  <a:prstClr val="white"/>
-                </a:solidFill>
-                <a:effectLst/>
-                <a:uLnTx/>
-                <a:uFillTx/>
-                <a:latin typeface="TradeGothic"/>
-                <a:ea typeface="+mn-ea"/>
-                <a:cs typeface="+mn-cs"/>
-              </a:rPr>
-              <a:t>@SIH Idea submission- Template</a:t>
-            </a:r>
-            <a:endParaRPr kumimoji="0" lang="en-US" sz="1200" b="0" i="0" u="none" strike="noStrike" kern="1200" cap="none" spc="0" normalizeH="0" baseline="0" noProof="0" dirty="0">
-              <a:ln>
-                <a:noFill/>
-              </a:ln>
-              <a:solidFill>
-                <a:prstClr val="white"/>
-              </a:solidFill>
-              <a:effectLst/>
-              <a:uLnTx/>
-              <a:uFillTx/>
-              <a:latin typeface="TradeGothic"/>
-              <a:ea typeface="+mn-ea"/>
-              <a:cs typeface="+mn-cs"/>
-            </a:endParaRPr>
-          </a:p>
-        </p:txBody>
-      </p:sp>
-      <p:sp>
-        <p:nvSpPr>
-          <p:cNvPr id="12" name="Oval 11" descr="Your startup LOGO">
-            <a:extLst>
-              <a:ext uri="{FF2B5EF4-FFF2-40B4-BE49-F238E27FC236}">
-                <a16:creationId xmlns:a16="http://schemas.microsoft.com/office/drawing/2014/main" id="{5DBCE864-823D-4A13-9607-5DA1F0ED5FB8}"/>
-              </a:ext>
-              <a:ext uri="{C183D7F6-B498-43B3-948B-1728B52AA6E4}">
-                <adec:decorative xmlns:adec="http://schemas.microsoft.com/office/drawing/2017/decorative" xmlns="" val="0"/>
-              </a:ext>
-            </a:extLst>
-          </p:cNvPr>
-          <p:cNvSpPr/>
-          <p:nvPr/>
-        </p:nvSpPr>
-        <p:spPr>
-          <a:xfrm>
-            <a:off x="329773" y="252246"/>
-            <a:ext cx="1251857" cy="807334"/>
-          </a:xfrm>
-          <a:prstGeom prst="ellipse">
-            <a:avLst/>
-          </a:prstGeom>
-        </p:spPr>
-        <p:style>
-          <a:lnRef idx="2">
-            <a:schemeClr val="accent4"/>
-          </a:lnRef>
-          <a:fillRef idx="1">
-            <a:schemeClr val="lt1"/>
-          </a:fillRef>
-          <a:effectRef idx="0">
-            <a:schemeClr val="accent4"/>
-          </a:effectRef>
-          <a:fontRef idx="minor">
-            <a:schemeClr val="dk1"/>
-          </a:fontRef>
-        </p:style>
-        <p:txBody>
-          <a:bodyPr rtlCol="0" anchor="ctr"/>
-          <a:lstStyle/>
-          <a:p>
-            <a:pPr algn="ctr"/>
-            <a:r>
-              <a:rPr b="1" sz="950">
-                <a:solidFill>
-                  <a:srgbClr val="FFFFFF"/>
-                </a:solidFill>
-              </a:rPr>
-              <a:t>ByteForce_1
-</a:t>
-            </a:r>
-            <a:r>
-              <a:rPr sz="850">
-                <a:solidFill>
-                  <a:srgbClr val="E0F2FE"/>
-                </a:solidFill>
-              </a:rPr>
-              <a:t>(ID: 180219)</a:t>
-            </a:r>
-            <a:endParaRPr lang="en-IN" dirty="0"/>
-          </a:p>
-        </p:txBody>
-      </p:sp>
       <p:pic>
         <p:nvPicPr>
-          <p:cNvPr id="11" name="Picture 10"/>
+          <p:cNvPr id="2" name="Picture 1" descr="slide_4.png"/>
           <p:cNvPicPr>
             <a:picLocks noChangeAspect="1"/>
           </p:cNvPicPr>
           <p:nvPr/>
         </p:nvPicPr>
         <p:blipFill>
-          <a:blip r:embed="rId3">
-            <a:extLst>
-              <a:ext uri="{28A0092B-C50C-407E-A947-70E740481C1C}">
-                <a14:useLocalDpi xmlns:a14="http://schemas.microsoft.com/office/drawing/2010/main" val="0"/>
-              </a:ext>
-            </a:extLst>
-          </a:blip>
+          <a:blip r:embed="rId4"/>
           <a:stretch>
             <a:fillRect/>
           </a:stretch>
         </p:blipFill>
         <p:spPr>
           <a:xfrm>
-            <a:off x="9780086" y="1500"/>
-            <a:ext cx="2249850" cy="1062337"/>
+            <a:off x="0" y="0"/>
+            <a:ext cx="12191969" cy="6858000"/>
           </a:xfrm>
           <a:prstGeom prst="rect">
             <a:avLst/>
           </a:prstGeom>
         </p:spPr>
       </p:pic>
-      <p:sp>
-        <p:nvSpPr>
-          <p:cNvPr id="17410" name="Rounded Rectangle 17409"/>
-          <p:cNvSpPr/>
-          <p:nvPr/>
-        </p:nvSpPr>
-        <p:spPr>
-          <a:xfrm>
-            <a:off x="502920" y="1188720"/>
-            <a:ext cx="3520440" cy="4434840"/>
-          </a:xfrm>
-          <a:prstGeom prst="roundRect">
-            <a:avLst/>
-          </a:prstGeom>
-          <a:solidFill>
-            <a:srgbClr val="F8FAFC"/>
-          </a:solidFill>
-          <a:ln w="19050">
-            <a:solidFill>
-              <a:srgbClr val="0284C7"/>
-            </a:solidFill>
-          </a:ln>
-        </p:spPr>
-        <p:style>
-          <a:lnRef idx="1">
-            <a:schemeClr val="accent1"/>
-          </a:lnRef>
-          <a:fillRef idx="3">
-            <a:schemeClr val="accent1"/>
-          </a:fillRef>
-          <a:effectRef idx="2">
-            <a:schemeClr val="accent1"/>
-          </a:effectRef>
-          <a:fontRef idx="minor">
-            <a:schemeClr val="lt1"/>
-          </a:fontRef>
-        </p:style>
-        <p:txBody>
-          <a:bodyPr rtlCol="0" anchor="ctr"/>
-          <a:lstStyle/>
-          <a:p>
-            <a:pPr algn="ctr"/>
-          </a:p>
-        </p:txBody>
-      </p:sp>
-      <p:sp>
-        <p:nvSpPr>
-          <p:cNvPr id="17411" name="Rounded Rectangle 17410"/>
-          <p:cNvSpPr/>
-          <p:nvPr/>
-        </p:nvSpPr>
-        <p:spPr>
-          <a:xfrm>
-            <a:off x="594360" y="1280160"/>
-            <a:ext cx="3337560" cy="384048"/>
-          </a:xfrm>
-          <a:prstGeom prst="roundRect">
-            <a:avLst/>
-          </a:prstGeom>
-          <a:solidFill>
-            <a:srgbClr val="0284C7"/>
-          </a:solidFill>
-          <a:ln>
-            <a:solidFill>
-              <a:srgbClr val="0284C7"/>
-            </a:solidFill>
-          </a:ln>
-        </p:spPr>
-        <p:style>
-          <a:lnRef idx="1">
-            <a:schemeClr val="accent1"/>
-          </a:lnRef>
-          <a:fillRef idx="3">
-            <a:schemeClr val="accent1"/>
-          </a:fillRef>
-          <a:effectRef idx="2">
-            <a:schemeClr val="accent1"/>
-          </a:effectRef>
-          <a:fontRef idx="minor">
-            <a:schemeClr val="lt1"/>
-          </a:fontRef>
-        </p:style>
-        <p:txBody>
-          <a:bodyPr rtlCol="0" anchor="ctr"/>
-          <a:lstStyle/>
-          <a:p>
-            <a:pPr algn="ctr">
-              <a:defRPr b="1" sz="1000">
-                <a:solidFill>
-                  <a:srgbClr val="FFFFFF"/>
-                </a:solidFill>
-              </a:defRPr>
-            </a:pPr>
-            <a:r>
-              <a:t>FEASIBILITY ANALYSIS</a:t>
-            </a:r>
-          </a:p>
-        </p:txBody>
-      </p:sp>
-      <p:sp>
-        <p:nvSpPr>
-          <p:cNvPr id="17412" name="TextBox 17411"/>
-          <p:cNvSpPr txBox="1"/>
-          <p:nvPr/>
-        </p:nvSpPr>
-        <p:spPr>
-          <a:xfrm>
-            <a:off x="612648" y="1737360"/>
-            <a:ext cx="3300984" cy="3794760"/>
-          </a:xfrm>
-          <a:prstGeom prst="rect">
-            <a:avLst/>
-          </a:prstGeom>
-          <a:noFill/>
-        </p:spPr>
-        <p:txBody>
-          <a:bodyPr wrap="square" lIns="0" rIns="0" tIns="0">
-            <a:spAutoFit/>
-          </a:bodyPr>
-          <a:lstStyle/>
-          <a:p>
-            <a:pPr>
-              <a:spcAft>
-                <a:spcPts val="100"/>
-              </a:spcAft>
-              <a:defRPr b="1" sz="880">
-                <a:solidFill>
-                  <a:srgbClr val="0284C7"/>
-                </a:solidFill>
-              </a:defRPr>
-            </a:pPr>
-            <a:r>
-              <a:t>✓ Plug-and-Play Ingestion</a:t>
-            </a:r>
-          </a:p>
-          <a:p>
-            <a:pPr>
-              <a:spcAft>
-                <a:spcPts val="500"/>
-              </a:spcAft>
-              <a:defRPr sz="780">
-                <a:solidFill>
-                  <a:srgbClr val="0F172A"/>
-                </a:solidFill>
-              </a:defRPr>
-            </a:pPr>
-            <a:r>
-              <a:t>Seamlessly connects with existing tools (Nessus, Qualys, AWS, Active Directory) via standard REST APIs without hardware changes.</a:t>
-            </a:r>
-          </a:p>
-          <a:p>
-            <a:pPr>
-              <a:spcAft>
-                <a:spcPts val="100"/>
-              </a:spcAft>
-              <a:defRPr b="1" sz="880">
-                <a:solidFill>
-                  <a:srgbClr val="0284C7"/>
-                </a:solidFill>
-              </a:defRPr>
-            </a:pPr>
-            <a:r>
-              <a:t>✓ Sub-Second Computation</a:t>
-            </a:r>
-          </a:p>
-          <a:p>
-            <a:pPr>
-              <a:spcAft>
-                <a:spcPts val="500"/>
-              </a:spcAft>
-              <a:defRPr sz="780">
-                <a:solidFill>
-                  <a:srgbClr val="0F172A"/>
-                </a:solidFill>
-              </a:defRPr>
-            </a:pPr>
-            <a:r>
-              <a:t>10,000 Monte Carlo runs execute in &lt;850ms in pure NumPy; dynamic programming knapsack completes in &lt;50ms.</a:t>
-            </a:r>
-          </a:p>
-          <a:p>
-            <a:pPr>
-              <a:spcAft>
-                <a:spcPts val="100"/>
-              </a:spcAft>
-              <a:defRPr b="1" sz="880">
-                <a:solidFill>
-                  <a:srgbClr val="0284C7"/>
-                </a:solidFill>
-              </a:defRPr>
-            </a:pPr>
-            <a:r>
-              <a:t>✓ Modular Microservices</a:t>
-            </a:r>
-          </a:p>
-          <a:p>
-            <a:pPr>
-              <a:spcAft>
-                <a:spcPts val="500"/>
-              </a:spcAft>
-              <a:defRPr sz="780">
-                <a:solidFill>
-                  <a:srgbClr val="0F172A"/>
-                </a:solidFill>
-              </a:defRPr>
-            </a:pPr>
-            <a:r>
-              <a:t>Dockerized, container-ready architecture allows independent scaling of analytics workers and API nodes.</a:t>
-            </a:r>
-          </a:p>
-          <a:p>
-            <a:pPr>
-              <a:spcAft>
-                <a:spcPts val="100"/>
-              </a:spcAft>
-              <a:defRPr b="1" sz="880">
-                <a:solidFill>
-                  <a:srgbClr val="0284C7"/>
-                </a:solidFill>
-              </a:defRPr>
-            </a:pPr>
-            <a:r>
-              <a:t>✓ Agentless Deployment</a:t>
-            </a:r>
-          </a:p>
-          <a:p>
-            <a:pPr>
-              <a:spcAft>
-                <a:spcPts val="500"/>
-              </a:spcAft>
-              <a:defRPr sz="780">
-                <a:solidFill>
-                  <a:srgbClr val="0F172A"/>
-                </a:solidFill>
-              </a:defRPr>
-            </a:pPr>
-            <a:r>
-              <a:t>Zero endpoint installation required, drastically reducing IT friction and operational overhead.</a:t>
-            </a:r>
-          </a:p>
-        </p:txBody>
-      </p:sp>
-      <p:sp>
-        <p:nvSpPr>
-          <p:cNvPr id="17413" name="Rounded Rectangle 17412"/>
-          <p:cNvSpPr/>
-          <p:nvPr/>
-        </p:nvSpPr>
-        <p:spPr>
-          <a:xfrm>
-            <a:off x="4160520" y="1188720"/>
-            <a:ext cx="3520440" cy="4434840"/>
-          </a:xfrm>
-          <a:prstGeom prst="roundRect">
-            <a:avLst/>
-          </a:prstGeom>
-          <a:solidFill>
-            <a:srgbClr val="F8FAFC"/>
-          </a:solidFill>
-          <a:ln w="19050">
-            <a:solidFill>
-              <a:srgbClr val="0F766E"/>
-            </a:solidFill>
-          </a:ln>
-        </p:spPr>
-        <p:style>
-          <a:lnRef idx="1">
-            <a:schemeClr val="accent1"/>
-          </a:lnRef>
-          <a:fillRef idx="3">
-            <a:schemeClr val="accent1"/>
-          </a:fillRef>
-          <a:effectRef idx="2">
-            <a:schemeClr val="accent1"/>
-          </a:effectRef>
-          <a:fontRef idx="minor">
-            <a:schemeClr val="lt1"/>
-          </a:fontRef>
-        </p:style>
-        <p:txBody>
-          <a:bodyPr rtlCol="0" anchor="ctr"/>
-          <a:lstStyle/>
-          <a:p>
-            <a:pPr algn="ctr"/>
-          </a:p>
-        </p:txBody>
-      </p:sp>
-      <p:sp>
-        <p:nvSpPr>
-          <p:cNvPr id="17414" name="Rounded Rectangle 17413"/>
-          <p:cNvSpPr/>
-          <p:nvPr/>
-        </p:nvSpPr>
-        <p:spPr>
-          <a:xfrm>
-            <a:off x="4251960" y="1280160"/>
-            <a:ext cx="3337560" cy="384048"/>
-          </a:xfrm>
-          <a:prstGeom prst="roundRect">
-            <a:avLst/>
-          </a:prstGeom>
-          <a:solidFill>
-            <a:srgbClr val="0F766E"/>
-          </a:solidFill>
-          <a:ln>
-            <a:solidFill>
-              <a:srgbClr val="0F766E"/>
-            </a:solidFill>
-          </a:ln>
-        </p:spPr>
-        <p:style>
-          <a:lnRef idx="1">
-            <a:schemeClr val="accent1"/>
-          </a:lnRef>
-          <a:fillRef idx="3">
-            <a:schemeClr val="accent1"/>
-          </a:fillRef>
-          <a:effectRef idx="2">
-            <a:schemeClr val="accent1"/>
-          </a:effectRef>
-          <a:fontRef idx="minor">
-            <a:schemeClr val="lt1"/>
-          </a:fontRef>
-        </p:style>
-        <p:txBody>
-          <a:bodyPr rtlCol="0" anchor="ctr"/>
-          <a:lstStyle/>
-          <a:p>
-            <a:pPr algn="ctr">
-              <a:defRPr b="1" sz="1000">
-                <a:solidFill>
-                  <a:srgbClr val="FFFFFF"/>
-                </a:solidFill>
-              </a:defRPr>
-            </a:pPr>
-            <a:r>
-              <a:t>VIABILITY &amp; GOVERNANCE</a:t>
-            </a:r>
-          </a:p>
-        </p:txBody>
-      </p:sp>
-      <p:sp>
-        <p:nvSpPr>
-          <p:cNvPr id="17415" name="TextBox 17414"/>
-          <p:cNvSpPr txBox="1"/>
-          <p:nvPr/>
-        </p:nvSpPr>
-        <p:spPr>
-          <a:xfrm>
-            <a:off x="4270248" y="1737360"/>
-            <a:ext cx="3300984" cy="3794760"/>
-          </a:xfrm>
-          <a:prstGeom prst="rect">
-            <a:avLst/>
-          </a:prstGeom>
-          <a:noFill/>
-        </p:spPr>
-        <p:txBody>
-          <a:bodyPr wrap="square" lIns="0" rIns="0" tIns="0">
-            <a:spAutoFit/>
-          </a:bodyPr>
-          <a:lstStyle/>
-          <a:p>
-            <a:pPr>
-              <a:spcAft>
-                <a:spcPts val="100"/>
-              </a:spcAft>
-              <a:defRPr b="1" sz="880">
-                <a:solidFill>
-                  <a:srgbClr val="0F766E"/>
-                </a:solidFill>
-              </a:defRPr>
-            </a:pPr>
-            <a:r>
-              <a:t>✓ Global Actuarial Standards</a:t>
-            </a:r>
-          </a:p>
-          <a:p>
-            <a:pPr>
-              <a:spcAft>
-                <a:spcPts val="500"/>
-              </a:spcAft>
-              <a:defRPr sz="780">
-                <a:solidFill>
-                  <a:srgbClr val="0F172A"/>
-                </a:solidFill>
-              </a:defRPr>
-            </a:pPr>
-            <a:r>
-              <a:t>Built strictly on Open Group FAIR &amp; NIST SP 800-30 Rev 1, accepted by boards and cyber insurers globally.</a:t>
-            </a:r>
-          </a:p>
-          <a:p>
-            <a:pPr>
-              <a:spcAft>
-                <a:spcPts val="100"/>
-              </a:spcAft>
-              <a:defRPr b="1" sz="880">
-                <a:solidFill>
-                  <a:srgbClr val="0F766E"/>
-                </a:solidFill>
-              </a:defRPr>
-            </a:pPr>
-            <a:r>
-              <a:t>✓ Regulatory Compliance</a:t>
-            </a:r>
-          </a:p>
-          <a:p>
-            <a:pPr>
-              <a:spcAft>
-                <a:spcPts val="500"/>
-              </a:spcAft>
-              <a:defRPr sz="780">
-                <a:solidFill>
-                  <a:srgbClr val="0F172A"/>
-                </a:solidFill>
-              </a:defRPr>
-            </a:pPr>
-            <a:r>
-              <a:t>Merkle audit proofs satisfy DPDP Act 2023, RBI Cyber Security Framework, and CERT-In logging directives.</a:t>
-            </a:r>
-          </a:p>
-          <a:p>
-            <a:pPr>
-              <a:spcAft>
-                <a:spcPts val="100"/>
-              </a:spcAft>
-              <a:defRPr b="1" sz="880">
-                <a:solidFill>
-                  <a:srgbClr val="0F766E"/>
-                </a:solidFill>
-              </a:defRPr>
-            </a:pPr>
-            <a:r>
-              <a:t>✓ Boardroom Defensibility</a:t>
-            </a:r>
-          </a:p>
-          <a:p>
-            <a:pPr>
-              <a:spcAft>
-                <a:spcPts val="500"/>
-              </a:spcAft>
-              <a:defRPr sz="780">
-                <a:solidFill>
-                  <a:srgbClr val="0F172A"/>
-                </a:solidFill>
-              </a:defRPr>
-            </a:pPr>
-            <a:r>
-              <a:t>Converts ambiguous technical CVSS scores into CFO-ready ₹ Rupee loss distributions and justified ROI.</a:t>
-            </a:r>
-          </a:p>
-          <a:p>
-            <a:pPr>
-              <a:spcAft>
-                <a:spcPts val="100"/>
-              </a:spcAft>
-              <a:defRPr b="1" sz="880">
-                <a:solidFill>
-                  <a:srgbClr val="0F766E"/>
-                </a:solidFill>
-              </a:defRPr>
-            </a:pPr>
-            <a:r>
-              <a:t>✓ Zero Vendor Lock-In</a:t>
-            </a:r>
-          </a:p>
-          <a:p>
-            <a:pPr>
-              <a:spcAft>
-                <a:spcPts val="500"/>
-              </a:spcAft>
-              <a:defRPr sz="780">
-                <a:solidFill>
-                  <a:srgbClr val="0F172A"/>
-                </a:solidFill>
-              </a:defRPr>
-            </a:pPr>
-            <a:r>
-              <a:t>Open JSON/CSV data schemas and open-standards compliance ensure transparent, portable risk registers.</a:t>
-            </a:r>
-          </a:p>
-        </p:txBody>
-      </p:sp>
-      <p:sp>
-        <p:nvSpPr>
-          <p:cNvPr id="17416" name="Rounded Rectangle 17415"/>
-          <p:cNvSpPr/>
-          <p:nvPr/>
-        </p:nvSpPr>
-        <p:spPr>
-          <a:xfrm>
-            <a:off x="7818120" y="1188720"/>
-            <a:ext cx="3520440" cy="4434840"/>
-          </a:xfrm>
-          <a:prstGeom prst="roundRect">
-            <a:avLst/>
-          </a:prstGeom>
-          <a:solidFill>
-            <a:srgbClr val="F8FAFC"/>
-          </a:solidFill>
-          <a:ln w="19050">
-            <a:solidFill>
-              <a:srgbClr val="7C3AED"/>
-            </a:solidFill>
-          </a:ln>
-        </p:spPr>
-        <p:style>
-          <a:lnRef idx="1">
-            <a:schemeClr val="accent1"/>
-          </a:lnRef>
-          <a:fillRef idx="3">
-            <a:schemeClr val="accent1"/>
-          </a:fillRef>
-          <a:effectRef idx="2">
-            <a:schemeClr val="accent1"/>
-          </a:effectRef>
-          <a:fontRef idx="minor">
-            <a:schemeClr val="lt1"/>
-          </a:fontRef>
-        </p:style>
-        <p:txBody>
-          <a:bodyPr rtlCol="0" anchor="ctr"/>
-          <a:lstStyle/>
-          <a:p>
-            <a:pPr algn="ctr"/>
-          </a:p>
-        </p:txBody>
-      </p:sp>
-      <p:sp>
-        <p:nvSpPr>
-          <p:cNvPr id="17417" name="Rounded Rectangle 17416"/>
-          <p:cNvSpPr/>
-          <p:nvPr/>
-        </p:nvSpPr>
-        <p:spPr>
-          <a:xfrm>
-            <a:off x="7909560" y="1280160"/>
-            <a:ext cx="3337560" cy="384048"/>
-          </a:xfrm>
-          <a:prstGeom prst="roundRect">
-            <a:avLst/>
-          </a:prstGeom>
-          <a:solidFill>
-            <a:srgbClr val="7C3AED"/>
-          </a:solidFill>
-          <a:ln>
-            <a:solidFill>
-              <a:srgbClr val="7C3AED"/>
-            </a:solidFill>
-          </a:ln>
-        </p:spPr>
-        <p:style>
-          <a:lnRef idx="1">
-            <a:schemeClr val="accent1"/>
-          </a:lnRef>
-          <a:fillRef idx="3">
-            <a:schemeClr val="accent1"/>
-          </a:fillRef>
-          <a:effectRef idx="2">
-            <a:schemeClr val="accent1"/>
-          </a:effectRef>
-          <a:fontRef idx="minor">
-            <a:schemeClr val="lt1"/>
-          </a:fontRef>
-        </p:style>
-        <p:txBody>
-          <a:bodyPr rtlCol="0" anchor="ctr"/>
-          <a:lstStyle/>
-          <a:p>
-            <a:pPr algn="ctr">
-              <a:defRPr b="1" sz="1000">
-                <a:solidFill>
-                  <a:srgbClr val="FFFFFF"/>
-                </a:solidFill>
-              </a:defRPr>
-            </a:pPr>
-            <a:r>
-              <a:t>BUSINESS POTENTIAL &amp; ROI</a:t>
-            </a:r>
-          </a:p>
-        </p:txBody>
-      </p:sp>
-      <p:sp>
-        <p:nvSpPr>
-          <p:cNvPr id="17418" name="TextBox 17417"/>
-          <p:cNvSpPr txBox="1"/>
-          <p:nvPr/>
-        </p:nvSpPr>
-        <p:spPr>
-          <a:xfrm>
-            <a:off x="7927848" y="1737360"/>
-            <a:ext cx="3300984" cy="3794760"/>
-          </a:xfrm>
-          <a:prstGeom prst="rect">
-            <a:avLst/>
-          </a:prstGeom>
-          <a:noFill/>
-        </p:spPr>
-        <p:txBody>
-          <a:bodyPr wrap="square" lIns="0" rIns="0" tIns="0">
-            <a:spAutoFit/>
-          </a:bodyPr>
-          <a:lstStyle/>
-          <a:p>
-            <a:pPr>
-              <a:spcAft>
-                <a:spcPts val="100"/>
-              </a:spcAft>
-              <a:defRPr b="1" sz="880">
-                <a:solidFill>
-                  <a:srgbClr val="7C3AED"/>
-                </a:solidFill>
-              </a:defRPr>
-            </a:pPr>
-            <a:r>
-              <a:t>✓ 70%+ Audit Cost Reduction</a:t>
-            </a:r>
-          </a:p>
-          <a:p>
-            <a:pPr>
-              <a:spcAft>
-                <a:spcPts val="500"/>
-              </a:spcAft>
-              <a:defRPr sz="780">
-                <a:solidFill>
-                  <a:srgbClr val="0F172A"/>
-                </a:solidFill>
-              </a:defRPr>
-            </a:pPr>
-            <a:r>
-              <a:t>Automates manual third-party cyber risk assessments, saving ₹20L–₹50L per annual enterprise audit cycle.</a:t>
-            </a:r>
-          </a:p>
-          <a:p>
-            <a:pPr>
-              <a:spcAft>
-                <a:spcPts val="100"/>
-              </a:spcAft>
-              <a:defRPr b="1" sz="880">
-                <a:solidFill>
-                  <a:srgbClr val="7C3AED"/>
-                </a:solidFill>
-              </a:defRPr>
-            </a:pPr>
-            <a:r>
-              <a:t>✓ Optimized Security Spend</a:t>
-            </a:r>
-          </a:p>
-          <a:p>
-            <a:pPr>
-              <a:spcAft>
-                <a:spcPts val="500"/>
-              </a:spcAft>
-              <a:defRPr sz="780">
-                <a:solidFill>
-                  <a:srgbClr val="0F172A"/>
-                </a:solidFill>
-              </a:defRPr>
-            </a:pPr>
-            <a:r>
-              <a:t>Dynamic knapsack allocation prevents overspending on low-impact controls, saving 25–40% of security budget.</a:t>
-            </a:r>
-          </a:p>
-          <a:p>
-            <a:pPr>
-              <a:spcAft>
-                <a:spcPts val="100"/>
-              </a:spcAft>
-              <a:defRPr b="1" sz="880">
-                <a:solidFill>
-                  <a:srgbClr val="7C3AED"/>
-                </a:solidFill>
-              </a:defRPr>
-            </a:pPr>
-            <a:r>
-              <a:t>✓ Enterprise Market Scale</a:t>
-            </a:r>
-          </a:p>
-          <a:p>
-            <a:pPr>
-              <a:spcAft>
-                <a:spcPts val="500"/>
-              </a:spcAft>
-              <a:defRPr sz="780">
-                <a:solidFill>
-                  <a:srgbClr val="0F172A"/>
-                </a:solidFill>
-              </a:defRPr>
-            </a:pPr>
-            <a:r>
-              <a:t>Targeted at BFSI, Healthcare, Critical Infrastructure, and IT enterprises needing continuous compliance.</a:t>
-            </a:r>
-          </a:p>
-          <a:p>
-            <a:pPr>
-              <a:spcAft>
-                <a:spcPts val="100"/>
-              </a:spcAft>
-              <a:defRPr b="1" sz="880">
-                <a:solidFill>
-                  <a:srgbClr val="7C3AED"/>
-                </a:solidFill>
-              </a:defRPr>
-            </a:pPr>
-            <a:r>
-              <a:t>✓ Cyber Insurance Alignment</a:t>
-            </a:r>
-          </a:p>
-          <a:p>
-            <a:pPr>
-              <a:spcAft>
-                <a:spcPts val="500"/>
-              </a:spcAft>
-              <a:defRPr sz="780">
-                <a:solidFill>
-                  <a:srgbClr val="0F172A"/>
-                </a:solidFill>
-              </a:defRPr>
-            </a:pPr>
-            <a:r>
-              <a:t>Empirical Value-at-Risk modeling accelerates policy underwriting and lowers corporate insurance premiums.</a:t>
-            </a:r>
-          </a:p>
-        </p:txBody>
-      </p:sp>
     </p:spTree>
     <p:extLst>
       <p:ext uri="{BB962C8B-B14F-4D97-AF65-F5344CB8AC3E}">
@@ -8235,847 +4866,9 @@
           <a:chExt cx="0" cy="0"/>
         </a:xfrm>
       </p:grpSpPr>
-      <p:sp>
-        <p:nvSpPr>
-          <p:cNvPr id="10" name="Rectangle 9">
-            <a:extLst>
-              <a:ext uri="{FF2B5EF4-FFF2-40B4-BE49-F238E27FC236}">
-                <a16:creationId xmlns:a16="http://schemas.microsoft.com/office/drawing/2014/main" id="{AD4F69D3-EEB0-4C4C-9434-B9960FB5854C}"/>
-              </a:ext>
-            </a:extLst>
-          </p:cNvPr>
-          <p:cNvSpPr>
-            <a:spLocks noChangeArrowheads="1"/>
-          </p:cNvSpPr>
-          <p:nvPr/>
-        </p:nvSpPr>
-        <p:spPr bwMode="auto">
-          <a:xfrm>
-            <a:off x="0" y="6354762"/>
-            <a:ext cx="12191999" cy="503238"/>
-          </a:xfrm>
-          <a:prstGeom prst="rect">
-            <a:avLst/>
-          </a:prstGeom>
-          <a:solidFill>
-            <a:srgbClr val="0070C0"/>
-          </a:solidFill>
-          <a:ln w="9525">
-            <a:noFill/>
-            <a:miter lim="800000"/>
-            <a:headEnd/>
-            <a:tailEnd/>
-          </a:ln>
-          <a:effectLst>
-            <a:outerShdw dist="23000" dir="5400000" rotWithShape="0">
-              <a:srgbClr val="808080">
-                <a:alpha val="34999"/>
-              </a:srgbClr>
-            </a:outerShdw>
-          </a:effectLst>
-        </p:spPr>
-        <p:txBody>
-          <a:bodyPr anchor="ctr"/>
-          <a:lstStyle/>
-          <a:p>
-            <a:pPr marL="0" marR="0" lvl="0" indent="0" algn="ctr" defTabSz="457200" rtl="0" eaLnBrk="1" fontAlgn="auto" latinLnBrk="0" hangingPunct="1">
-              <a:lnSpc>
-                <a:spcPct val="100000"/>
-              </a:lnSpc>
-              <a:spcBef>
-                <a:spcPts val="0"/>
-              </a:spcBef>
-              <a:spcAft>
-                <a:spcPts val="0"/>
-              </a:spcAft>
-              <a:buClrTx/>
-              <a:buSzTx/>
-              <a:buFontTx/>
-              <a:buNone/>
-              <a:tabLst/>
-              <a:defRPr/>
-            </a:pPr>
-            <a:endParaRPr kumimoji="0" lang="en-US" sz="1800" b="0" i="0" u="none" strike="noStrike" kern="1200" cap="none" spc="0" normalizeH="0" baseline="0" noProof="0" dirty="0">
-              <a:ln>
-                <a:noFill/>
-              </a:ln>
-              <a:solidFill>
-                <a:srgbClr val="C0504D">
-                  <a:lumMod val="75000"/>
-                </a:srgbClr>
-              </a:solidFill>
-              <a:effectLst/>
-              <a:uLnTx/>
-              <a:uFillTx/>
-              <a:latin typeface="Calibri"/>
-              <a:ea typeface="ＭＳ Ｐゴシック" pitchFamily="1" charset="-128"/>
-              <a:cs typeface="+mn-cs"/>
-            </a:endParaRPr>
-          </a:p>
-        </p:txBody>
-      </p:sp>
-      <p:sp>
-        <p:nvSpPr>
-          <p:cNvPr id="17409" name="Title 1"/>
-          <p:cNvSpPr>
-            <a:spLocks noGrp="1"/>
-          </p:cNvSpPr>
-          <p:nvPr>
-            <p:ph type="title"/>
-          </p:nvPr>
-        </p:nvSpPr>
-        <p:spPr/>
-        <p:txBody>
-          <a:bodyPr/>
-          <a:lstStyle/>
-          <a:p>
-            <a:pPr>
-              <a:defRPr sz="2000" b="1">
-                <a:solidFill>
-                  <a:srgbClr val="0F172A"/>
-                </a:solidFill>
-              </a:defRPr>
-            </a:pPr>
-            <a:r>
-              <a:t>IMPACT AND BENEFITS</a:t>
-            </a:r>
-          </a:p>
-        </p:txBody>
-      </p:sp>
-      <p:sp>
-        <p:nvSpPr>
-          <p:cNvPr id="6" name="Slide Number Placeholder 5"/>
-          <p:cNvSpPr>
-            <a:spLocks noGrp="1"/>
-          </p:cNvSpPr>
-          <p:nvPr>
-            <p:ph type="sldNum" sz="quarter" idx="12"/>
-          </p:nvPr>
-        </p:nvSpPr>
-        <p:spPr/>
-        <p:txBody>
-          <a:bodyPr/>
-          <a:lstStyle/>
-          <a:p>
-            <a:pPr marL="0" marR="0" lvl="0" indent="0" algn="r" defTabSz="457200" rtl="0" eaLnBrk="1" fontAlgn="base" latinLnBrk="0" hangingPunct="1">
-              <a:lnSpc>
-                <a:spcPct val="100000"/>
-              </a:lnSpc>
-              <a:spcBef>
-                <a:spcPct val="0"/>
-              </a:spcBef>
-              <a:spcAft>
-                <a:spcPct val="0"/>
-              </a:spcAft>
-              <a:buClrTx/>
-              <a:buSzTx/>
-              <a:buFontTx/>
-              <a:buNone/>
-              <a:tabLst/>
-              <a:defRPr/>
-            </a:pPr>
-            <a:fld id="{677C3CE7-23F7-4828-823C-E0205DF2CF97}" type="slidenum">
-              <a:rPr kumimoji="0" lang="en-US" sz="1200" b="1" i="0" u="none" strike="noStrike" kern="1200" cap="none" spc="0" normalizeH="0" baseline="0" noProof="0">
-                <a:ln>
-                  <a:noFill/>
-                </a:ln>
-                <a:solidFill>
-                  <a:prstClr val="white"/>
-                </a:solidFill>
-                <a:effectLst/>
-                <a:uLnTx/>
-                <a:uFillTx/>
-                <a:latin typeface="TradeGothic" pitchFamily="1" charset="0"/>
-                <a:ea typeface="ＭＳ Ｐゴシック" pitchFamily="1" charset="-128"/>
-                <a:cs typeface="+mn-cs"/>
-              </a:rPr>
-              <a:pPr marL="0" marR="0" lvl="0" indent="0" algn="r" defTabSz="457200" rtl="0" eaLnBrk="1" fontAlgn="base" latinLnBrk="0" hangingPunct="1">
-                <a:lnSpc>
-                  <a:spcPct val="100000"/>
-                </a:lnSpc>
-                <a:spcBef>
-                  <a:spcPct val="0"/>
-                </a:spcBef>
-                <a:spcAft>
-                  <a:spcPct val="0"/>
-                </a:spcAft>
-                <a:buClrTx/>
-                <a:buSzTx/>
-                <a:buFontTx/>
-                <a:buNone/>
-                <a:tabLst/>
-                <a:defRPr/>
-              </a:pPr>
-              <a:t>5</a:t>
-            </a:fld>
-            <a:endParaRPr kumimoji="0" lang="en-US" sz="1200" b="1" i="0" u="none" strike="noStrike" kern="1200" cap="none" spc="0" normalizeH="0" baseline="0" noProof="0" dirty="0">
-              <a:ln>
-                <a:noFill/>
-              </a:ln>
-              <a:solidFill>
-                <a:prstClr val="white"/>
-              </a:solidFill>
-              <a:effectLst/>
-              <a:uLnTx/>
-              <a:uFillTx/>
-              <a:latin typeface="TradeGothic" pitchFamily="1" charset="0"/>
-              <a:ea typeface="ＭＳ Ｐゴシック" pitchFamily="1" charset="-128"/>
-              <a:cs typeface="+mn-cs"/>
-            </a:endParaRPr>
-          </a:p>
-        </p:txBody>
-      </p:sp>
-      <p:sp>
-        <p:nvSpPr>
-          <p:cNvPr id="7" name="Footer Placeholder 6"/>
-          <p:cNvSpPr>
-            <a:spLocks noGrp="1"/>
-          </p:cNvSpPr>
-          <p:nvPr>
-            <p:ph type="ftr" sz="quarter" idx="11"/>
-          </p:nvPr>
-        </p:nvSpPr>
-        <p:spPr>
-          <a:xfrm>
-            <a:off x="4648200" y="6356353"/>
-            <a:ext cx="3204000" cy="365125"/>
-          </a:xfrm>
-        </p:spPr>
-        <p:txBody>
-          <a:bodyPr/>
-          <a:lstStyle/>
-          <a:p>
-            <a:pPr marL="0" marR="0" lvl="0" indent="0" algn="ctr" defTabSz="457200" rtl="0" eaLnBrk="1" fontAlgn="auto" latinLnBrk="0" hangingPunct="1">
-              <a:lnSpc>
-                <a:spcPct val="100000"/>
-              </a:lnSpc>
-              <a:spcBef>
-                <a:spcPts val="0"/>
-              </a:spcBef>
-              <a:spcAft>
-                <a:spcPts val="0"/>
-              </a:spcAft>
-              <a:buClrTx/>
-              <a:buSzTx/>
-              <a:buFontTx/>
-              <a:buNone/>
-              <a:tabLst/>
-              <a:defRPr/>
-            </a:pPr>
-            <a:r>
-              <a:rPr kumimoji="0" lang="en-US" sz="1200" b="0" i="0" u="none" strike="noStrike" kern="1200" cap="none" spc="0" normalizeH="0" baseline="0" noProof="0">
-                <a:ln>
-                  <a:noFill/>
-                </a:ln>
-                <a:solidFill>
-                  <a:prstClr val="white"/>
-                </a:solidFill>
-                <a:effectLst/>
-                <a:uLnTx/>
-                <a:uFillTx/>
-                <a:latin typeface="TradeGothic"/>
-                <a:ea typeface="+mn-ea"/>
-                <a:cs typeface="+mn-cs"/>
-              </a:rPr>
-              <a:t>@SIH Idea submission- Template</a:t>
-            </a:r>
-            <a:endParaRPr kumimoji="0" lang="en-US" sz="1200" b="0" i="0" u="none" strike="noStrike" kern="1200" cap="none" spc="0" normalizeH="0" baseline="0" noProof="0" dirty="0">
-              <a:ln>
-                <a:noFill/>
-              </a:ln>
-              <a:solidFill>
-                <a:prstClr val="white"/>
-              </a:solidFill>
-              <a:effectLst/>
-              <a:uLnTx/>
-              <a:uFillTx/>
-              <a:latin typeface="TradeGothic"/>
-              <a:ea typeface="+mn-ea"/>
-              <a:cs typeface="+mn-cs"/>
-            </a:endParaRPr>
-          </a:p>
-        </p:txBody>
-      </p:sp>
-      <p:sp>
-        <p:nvSpPr>
-          <p:cNvPr id="12" name="Oval 11" descr="Your startup LOGO">
-            <a:extLst>
-              <a:ext uri="{FF2B5EF4-FFF2-40B4-BE49-F238E27FC236}">
-                <a16:creationId xmlns:a16="http://schemas.microsoft.com/office/drawing/2014/main" id="{5DBCE864-823D-4A13-9607-5DA1F0ED5FB8}"/>
-              </a:ext>
-              <a:ext uri="{C183D7F6-B498-43B3-948B-1728B52AA6E4}">
-                <adec:decorative xmlns:adec="http://schemas.microsoft.com/office/drawing/2017/decorative" xmlns="" val="0"/>
-              </a:ext>
-            </a:extLst>
-          </p:cNvPr>
-          <p:cNvSpPr/>
-          <p:nvPr/>
-        </p:nvSpPr>
-        <p:spPr>
-          <a:xfrm>
-            <a:off x="329773" y="252246"/>
-            <a:ext cx="1251857" cy="807334"/>
-          </a:xfrm>
-          <a:prstGeom prst="ellipse">
-            <a:avLst/>
-          </a:prstGeom>
-        </p:spPr>
-        <p:style>
-          <a:lnRef idx="2">
-            <a:schemeClr val="accent4"/>
-          </a:lnRef>
-          <a:fillRef idx="1">
-            <a:schemeClr val="lt1"/>
-          </a:fillRef>
-          <a:effectRef idx="0">
-            <a:schemeClr val="accent4"/>
-          </a:effectRef>
-          <a:fontRef idx="minor">
-            <a:schemeClr val="dk1"/>
-          </a:fontRef>
-        </p:style>
-        <p:txBody>
-          <a:bodyPr rtlCol="0" anchor="ctr"/>
-          <a:lstStyle/>
-          <a:p>
-            <a:pPr algn="ctr"/>
-            <a:r>
-              <a:rPr b="1" sz="950">
-                <a:solidFill>
-                  <a:srgbClr val="FFFFFF"/>
-                </a:solidFill>
-              </a:rPr>
-              <a:t>ByteForce_1
-</a:t>
-            </a:r>
-            <a:r>
-              <a:rPr sz="850">
-                <a:solidFill>
-                  <a:srgbClr val="E0F2FE"/>
-                </a:solidFill>
-              </a:rPr>
-              <a:t>(ID: 180219)</a:t>
-            </a:r>
-            <a:endParaRPr lang="en-IN" dirty="0"/>
-          </a:p>
-        </p:txBody>
-      </p:sp>
       <p:pic>
         <p:nvPicPr>
-          <p:cNvPr id="11" name="Picture 10"/>
-          <p:cNvPicPr>
-            <a:picLocks noChangeAspect="1"/>
-          </p:cNvPicPr>
-          <p:nvPr/>
-        </p:nvPicPr>
-        <p:blipFill>
-          <a:blip r:embed="rId3">
-            <a:extLst>
-              <a:ext uri="{28A0092B-C50C-407E-A947-70E740481C1C}">
-                <a14:useLocalDpi xmlns:a14="http://schemas.microsoft.com/office/drawing/2010/main" val="0"/>
-              </a:ext>
-            </a:extLst>
-          </a:blip>
-          <a:stretch>
-            <a:fillRect/>
-          </a:stretch>
-        </p:blipFill>
-        <p:spPr>
-          <a:xfrm>
-            <a:off x="9780086" y="1500"/>
-            <a:ext cx="2249850" cy="1062337"/>
-          </a:xfrm>
-          <a:prstGeom prst="rect">
-            <a:avLst/>
-          </a:prstGeom>
-        </p:spPr>
-      </p:pic>
-      <p:sp>
-        <p:nvSpPr>
-          <p:cNvPr id="17410" name="Rounded Rectangle 17409"/>
-          <p:cNvSpPr/>
-          <p:nvPr/>
-        </p:nvSpPr>
-        <p:spPr>
-          <a:xfrm>
-            <a:off x="502920" y="1188720"/>
-            <a:ext cx="6217920" cy="3886200"/>
-          </a:xfrm>
-          <a:prstGeom prst="roundRect">
-            <a:avLst/>
-          </a:prstGeom>
-          <a:solidFill>
-            <a:srgbClr val="F8FAFC"/>
-          </a:solidFill>
-          <a:ln w="12700">
-            <a:solidFill>
-              <a:srgbClr val="BAE6FD"/>
-            </a:solidFill>
-          </a:ln>
-        </p:spPr>
-        <p:style>
-          <a:lnRef idx="1">
-            <a:schemeClr val="accent1"/>
-          </a:lnRef>
-          <a:fillRef idx="3">
-            <a:schemeClr val="accent1"/>
-          </a:fillRef>
-          <a:effectRef idx="2">
-            <a:schemeClr val="accent1"/>
-          </a:effectRef>
-          <a:fontRef idx="minor">
-            <a:schemeClr val="lt1"/>
-          </a:fontRef>
-        </p:style>
-        <p:txBody>
-          <a:bodyPr rtlCol="0" anchor="ctr"/>
-          <a:lstStyle/>
-          <a:p>
-            <a:pPr algn="ctr"/>
-          </a:p>
-        </p:txBody>
-      </p:sp>
-      <p:sp>
-        <p:nvSpPr>
-          <p:cNvPr id="17411" name="Rounded Rectangle 17410"/>
-          <p:cNvSpPr/>
-          <p:nvPr/>
-        </p:nvSpPr>
-        <p:spPr>
-          <a:xfrm>
-            <a:off x="685800" y="1298448"/>
-            <a:ext cx="5852160" cy="384048"/>
-          </a:xfrm>
-          <a:prstGeom prst="roundRect">
-            <a:avLst/>
-          </a:prstGeom>
-          <a:solidFill>
-            <a:srgbClr val="0F172A"/>
-          </a:solidFill>
-          <a:ln>
-            <a:solidFill>
-              <a:srgbClr val="0284C7"/>
-            </a:solidFill>
-          </a:ln>
-        </p:spPr>
-        <p:style>
-          <a:lnRef idx="1">
-            <a:schemeClr val="accent1"/>
-          </a:lnRef>
-          <a:fillRef idx="3">
-            <a:schemeClr val="accent1"/>
-          </a:fillRef>
-          <a:effectRef idx="2">
-            <a:schemeClr val="accent1"/>
-          </a:effectRef>
-          <a:fontRef idx="minor">
-            <a:schemeClr val="lt1"/>
-          </a:fontRef>
-        </p:style>
-        <p:txBody>
-          <a:bodyPr rtlCol="0" anchor="ctr"/>
-          <a:lstStyle/>
-          <a:p>
-            <a:pPr algn="ctr">
-              <a:defRPr b="1" sz="1000">
-                <a:solidFill>
-                  <a:srgbClr val="38BDF8"/>
-                </a:solidFill>
-              </a:defRPr>
-            </a:pPr>
-            <a:r>
-              <a:t>AURA SENTINEL // MULTI-DIMENSIONAL IMPACT MATRIX</a:t>
-            </a:r>
-          </a:p>
-        </p:txBody>
-      </p:sp>
-      <p:sp>
-        <p:nvSpPr>
-          <p:cNvPr id="17412" name="Rounded Rectangle 17411"/>
-          <p:cNvSpPr/>
-          <p:nvPr/>
-        </p:nvSpPr>
-        <p:spPr>
-          <a:xfrm>
-            <a:off x="685800" y="1783080"/>
-            <a:ext cx="2834640" cy="3154680"/>
-          </a:xfrm>
-          <a:prstGeom prst="roundRect">
-            <a:avLst/>
-          </a:prstGeom>
-          <a:solidFill>
-            <a:srgbClr val="F0FDF4"/>
-          </a:solidFill>
-          <a:ln>
-            <a:solidFill>
-              <a:srgbClr val="BBF7D0"/>
-            </a:solidFill>
-          </a:ln>
-        </p:spPr>
-        <p:style>
-          <a:lnRef idx="1">
-            <a:schemeClr val="accent1"/>
-          </a:lnRef>
-          <a:fillRef idx="3">
-            <a:schemeClr val="accent1"/>
-          </a:fillRef>
-          <a:effectRef idx="2">
-            <a:schemeClr val="accent1"/>
-          </a:effectRef>
-          <a:fontRef idx="minor">
-            <a:schemeClr val="lt1"/>
-          </a:fontRef>
-        </p:style>
-        <p:txBody>
-          <a:bodyPr rtlCol="0" anchor="ctr" wrap="square" tIns="73152"/>
-          <a:lstStyle/>
-          <a:p>
-            <a:pPr algn="ctr">
-              <a:spcAft>
-                <a:spcPts val="400"/>
-              </a:spcAft>
-              <a:defRPr b="1" sz="950">
-                <a:solidFill>
-                  <a:srgbClr val="10B981"/>
-                </a:solidFill>
-              </a:defRPr>
-            </a:pPr>
-            <a:r>
-              <a:t>OPERATIONAL ADVANTAGES</a:t>
-            </a:r>
-          </a:p>
-          <a:p>
-            <a:pPr>
-              <a:defRPr b="1" sz="819">
-                <a:solidFill>
-                  <a:srgbClr val="065F46"/>
-                </a:solidFill>
-              </a:defRPr>
-            </a:pPr>
-            <a:r>
-              <a:t>● 24/7 Continuous Visibility</a:t>
-            </a:r>
-          </a:p>
-          <a:p>
-            <a:pPr>
-              <a:spcAft>
-                <a:spcPts val="300"/>
-              </a:spcAft>
-              <a:defRPr sz="720">
-                <a:solidFill>
-                  <a:srgbClr val="0F172A"/>
-                </a:solidFill>
-              </a:defRPr>
-            </a:pPr>
-            <a:r>
-              <a:t>Replaces periodic static audits with real-time dynamic risk quantification.</a:t>
-            </a:r>
-          </a:p>
-          <a:p>
-            <a:pPr>
-              <a:defRPr b="1" sz="819">
-                <a:solidFill>
-                  <a:srgbClr val="065F46"/>
-                </a:solidFill>
-              </a:defRPr>
-            </a:pPr>
-            <a:r>
-              <a:t>● Optimal Budget ROI</a:t>
-            </a:r>
-          </a:p>
-          <a:p>
-            <a:pPr>
-              <a:spcAft>
-                <a:spcPts val="300"/>
-              </a:spcAft>
-              <a:defRPr sz="720">
-                <a:solidFill>
-                  <a:srgbClr val="0F172A"/>
-                </a:solidFill>
-              </a:defRPr>
-            </a:pPr>
-            <a:r>
-              <a:t>Knapsack algorithm maximizes security risk reduction per Rupee invested.</a:t>
-            </a:r>
-          </a:p>
-          <a:p>
-            <a:pPr>
-              <a:defRPr b="1" sz="819">
-                <a:solidFill>
-                  <a:srgbClr val="065F46"/>
-                </a:solidFill>
-              </a:defRPr>
-            </a:pPr>
-            <a:r>
-              <a:t>● Impact Remediation</a:t>
-            </a:r>
-          </a:p>
-          <a:p>
-            <a:pPr>
-              <a:spcAft>
-                <a:spcPts val="300"/>
-              </a:spcAft>
-              <a:defRPr sz="720">
-                <a:solidFill>
-                  <a:srgbClr val="0F172A"/>
-                </a:solidFill>
-              </a:defRPr>
-            </a:pPr>
-            <a:r>
-              <a:t>Fixes vulnerabilities based on financial loss risk rather than CVSS noise alone.</a:t>
-            </a:r>
-          </a:p>
-          <a:p>
-            <a:pPr>
-              <a:defRPr b="1" sz="819">
-                <a:solidFill>
-                  <a:srgbClr val="065F46"/>
-                </a:solidFill>
-              </a:defRPr>
-            </a:pPr>
-            <a:r>
-              <a:t>● Cryptographic Audit</a:t>
-            </a:r>
-          </a:p>
-          <a:p>
-            <a:pPr>
-              <a:spcAft>
-                <a:spcPts val="300"/>
-              </a:spcAft>
-              <a:defRPr sz="720">
-                <a:solidFill>
-                  <a:srgbClr val="0F172A"/>
-                </a:solidFill>
-              </a:defRPr>
-            </a:pPr>
-            <a:r>
-              <a:t>Tamper-proof Merkle ledger guarantees verifiable non-repudiation.</a:t>
-            </a:r>
-          </a:p>
-        </p:txBody>
-      </p:sp>
-      <p:sp>
-        <p:nvSpPr>
-          <p:cNvPr id="17413" name="Rounded Rectangle 17412"/>
-          <p:cNvSpPr/>
-          <p:nvPr/>
-        </p:nvSpPr>
-        <p:spPr>
-          <a:xfrm>
-            <a:off x="3611880" y="1783080"/>
-            <a:ext cx="2926080" cy="3154680"/>
-          </a:xfrm>
-          <a:prstGeom prst="roundRect">
-            <a:avLst/>
-          </a:prstGeom>
-          <a:solidFill>
-            <a:srgbClr val="F0F9FF"/>
-          </a:solidFill>
-          <a:ln>
-            <a:solidFill>
-              <a:srgbClr val="BAE6FD"/>
-            </a:solidFill>
-          </a:ln>
-        </p:spPr>
-        <p:style>
-          <a:lnRef idx="1">
-            <a:schemeClr val="accent1"/>
-          </a:lnRef>
-          <a:fillRef idx="3">
-            <a:schemeClr val="accent1"/>
-          </a:fillRef>
-          <a:effectRef idx="2">
-            <a:schemeClr val="accent1"/>
-          </a:effectRef>
-          <a:fontRef idx="minor">
-            <a:schemeClr val="lt1"/>
-          </a:fontRef>
-        </p:style>
-        <p:txBody>
-          <a:bodyPr rtlCol="0" anchor="ctr" wrap="square" tIns="73152"/>
-          <a:lstStyle/>
-          <a:p>
-            <a:pPr algn="ctr">
-              <a:spcAft>
-                <a:spcPts val="400"/>
-              </a:spcAft>
-              <a:defRPr b="1" sz="950">
-                <a:solidFill>
-                  <a:srgbClr val="0284C7"/>
-                </a:solidFill>
-              </a:defRPr>
-            </a:pPr>
-            <a:r>
-              <a:t>STRATEGIC &amp; REGULATORY PILLARS</a:t>
-            </a:r>
-          </a:p>
-          <a:p>
-            <a:pPr>
-              <a:defRPr b="1" sz="819">
-                <a:solidFill>
-                  <a:srgbClr val="0369A1"/>
-                </a:solidFill>
-              </a:defRPr>
-            </a:pPr>
-            <a:r>
-              <a:t>● Boardroom Financial Clarity</a:t>
-            </a:r>
-          </a:p>
-          <a:p>
-            <a:pPr>
-              <a:spcAft>
-                <a:spcPts val="300"/>
-              </a:spcAft>
-              <a:defRPr sz="720">
-                <a:solidFill>
-                  <a:srgbClr val="0F172A"/>
-                </a:solidFill>
-              </a:defRPr>
-            </a:pPr>
-            <a:r>
-              <a:t>Translates cyber exposure into Value-at-Risk (₹ Crores) for executive consensus.</a:t>
-            </a:r>
-          </a:p>
-          <a:p>
-            <a:pPr>
-              <a:defRPr b="1" sz="819">
-                <a:solidFill>
-                  <a:srgbClr val="0369A1"/>
-                </a:solidFill>
-              </a:defRPr>
-            </a:pPr>
-            <a:r>
-              <a:t>● Compliance Readiness</a:t>
-            </a:r>
-          </a:p>
-          <a:p>
-            <a:pPr>
-              <a:spcAft>
-                <a:spcPts val="300"/>
-              </a:spcAft>
-              <a:defRPr sz="720">
-                <a:solidFill>
-                  <a:srgbClr val="0F172A"/>
-                </a:solidFill>
-              </a:defRPr>
-            </a:pPr>
-            <a:r>
-              <a:t>Automates reporting for DPDP Act 2023, RBI Cyber Guidelines, &amp; CERT-In.</a:t>
-            </a:r>
-          </a:p>
-          <a:p>
-            <a:pPr>
-              <a:defRPr b="1" sz="819">
-                <a:solidFill>
-                  <a:srgbClr val="0369A1"/>
-                </a:solidFill>
-              </a:defRPr>
-            </a:pPr>
-            <a:r>
-              <a:t>● Cyber Insurance Underwriting</a:t>
-            </a:r>
-          </a:p>
-          <a:p>
-            <a:pPr>
-              <a:spcAft>
-                <a:spcPts val="300"/>
-              </a:spcAft>
-              <a:defRPr sz="720">
-                <a:solidFill>
-                  <a:srgbClr val="0F172A"/>
-                </a:solidFill>
-              </a:defRPr>
-            </a:pPr>
-            <a:r>
-              <a:t>Provides empirical loss exceedance curves required for favorable policy rates.</a:t>
-            </a:r>
-          </a:p>
-          <a:p>
-            <a:pPr>
-              <a:defRPr b="1" sz="819">
-                <a:solidFill>
-                  <a:srgbClr val="0369A1"/>
-                </a:solidFill>
-              </a:defRPr>
-            </a:pPr>
-            <a:r>
-              <a:t>● Unified C-Suite Vocabulary</a:t>
-            </a:r>
-          </a:p>
-          <a:p>
-            <a:pPr>
-              <a:spcAft>
-                <a:spcPts val="300"/>
-              </a:spcAft>
-              <a:defRPr sz="720">
-                <a:solidFill>
-                  <a:srgbClr val="0F172A"/>
-                </a:solidFill>
-              </a:defRPr>
-            </a:pPr>
-            <a:r>
-              <a:t>Bridges the technical communication gap between SOC analysts and CFO/Board.</a:t>
-            </a:r>
-          </a:p>
-        </p:txBody>
-      </p:sp>
-      <p:sp>
-        <p:nvSpPr>
-          <p:cNvPr id="17414" name="Rounded Rectangle 17413"/>
-          <p:cNvSpPr/>
-          <p:nvPr/>
-        </p:nvSpPr>
-        <p:spPr>
-          <a:xfrm>
-            <a:off x="502920" y="5166360"/>
-            <a:ext cx="6217920" cy="411480"/>
-          </a:xfrm>
-          <a:prstGeom prst="roundRect">
-            <a:avLst/>
-          </a:prstGeom>
-          <a:solidFill>
-            <a:srgbClr val="0F172A"/>
-          </a:solidFill>
-          <a:ln>
-            <a:solidFill>
-              <a:srgbClr val="0284C7"/>
-            </a:solidFill>
-          </a:ln>
-        </p:spPr>
-        <p:style>
-          <a:lnRef idx="1">
-            <a:schemeClr val="accent1"/>
-          </a:lnRef>
-          <a:fillRef idx="3">
-            <a:schemeClr val="accent1"/>
-          </a:fillRef>
-          <a:effectRef idx="2">
-            <a:schemeClr val="accent1"/>
-          </a:effectRef>
-          <a:fontRef idx="minor">
-            <a:schemeClr val="lt1"/>
-          </a:fontRef>
-        </p:style>
-        <p:txBody>
-          <a:bodyPr rtlCol="0" anchor="ctr"/>
-          <a:lstStyle/>
-          <a:p>
-            <a:pPr algn="ctr">
-              <a:defRPr b="1" sz="950">
-                <a:solidFill>
-                  <a:srgbClr val="FFFFFF"/>
-                </a:solidFill>
-              </a:defRPr>
-            </a:pPr>
-            <a:r>
-              <a:t>★ Paradigm Shift: From Subjective Guesswork to Actuarial Financial Precision ★</a:t>
-            </a:r>
-          </a:p>
-        </p:txBody>
-      </p:sp>
-      <p:pic>
-        <p:nvPicPr>
-          <p:cNvPr id="17415" name="Picture 17414" descr="slide5_chart.png"/>
+          <p:cNvPr id="2" name="Picture 1" descr="slide_5.png"/>
           <p:cNvPicPr>
             <a:picLocks noChangeAspect="1"/>
           </p:cNvPicPr>
@@ -9089,8 +4882,8 @@
         </p:blipFill>
         <p:spPr>
           <a:xfrm>
-            <a:off x="6903720" y="1188720"/>
-            <a:ext cx="4754880" cy="4389120"/>
+            <a:off x="0" y="0"/>
+            <a:ext cx="12191969" cy="6858000"/>
           </a:xfrm>
           <a:prstGeom prst="rect">
             <a:avLst/>
@@ -9127,638 +4920,9 @@
           <a:chExt cx="0" cy="0"/>
         </a:xfrm>
       </p:grpSpPr>
-      <p:sp>
-        <p:nvSpPr>
-          <p:cNvPr id="10" name="Rectangle 9">
-            <a:extLst>
-              <a:ext uri="{FF2B5EF4-FFF2-40B4-BE49-F238E27FC236}">
-                <a16:creationId xmlns:a16="http://schemas.microsoft.com/office/drawing/2014/main" id="{AD4F69D3-EEB0-4C4C-9434-B9960FB5854C}"/>
-              </a:ext>
-            </a:extLst>
-          </p:cNvPr>
-          <p:cNvSpPr>
-            <a:spLocks noChangeArrowheads="1"/>
-          </p:cNvSpPr>
-          <p:nvPr/>
-        </p:nvSpPr>
-        <p:spPr bwMode="auto">
-          <a:xfrm>
-            <a:off x="0" y="6354762"/>
-            <a:ext cx="12191999" cy="503238"/>
-          </a:xfrm>
-          <a:prstGeom prst="rect">
-            <a:avLst/>
-          </a:prstGeom>
-          <a:solidFill>
-            <a:srgbClr val="0070C0"/>
-          </a:solidFill>
-          <a:ln w="9525">
-            <a:noFill/>
-            <a:miter lim="800000"/>
-            <a:headEnd/>
-            <a:tailEnd/>
-          </a:ln>
-          <a:effectLst>
-            <a:outerShdw dist="23000" dir="5400000" rotWithShape="0">
-              <a:srgbClr val="808080">
-                <a:alpha val="34999"/>
-              </a:srgbClr>
-            </a:outerShdw>
-          </a:effectLst>
-        </p:spPr>
-        <p:txBody>
-          <a:bodyPr anchor="ctr"/>
-          <a:lstStyle/>
-          <a:p>
-            <a:pPr marL="0" marR="0" lvl="0" indent="0" algn="ctr" defTabSz="457200" rtl="0" eaLnBrk="1" fontAlgn="auto" latinLnBrk="0" hangingPunct="1">
-              <a:lnSpc>
-                <a:spcPct val="100000"/>
-              </a:lnSpc>
-              <a:spcBef>
-                <a:spcPts val="0"/>
-              </a:spcBef>
-              <a:spcAft>
-                <a:spcPts val="0"/>
-              </a:spcAft>
-              <a:buClrTx/>
-              <a:buSzTx/>
-              <a:buFontTx/>
-              <a:buNone/>
-              <a:tabLst/>
-              <a:defRPr/>
-            </a:pPr>
-            <a:endParaRPr kumimoji="0" lang="en-US" sz="1800" b="0" i="0" u="none" strike="noStrike" kern="1200" cap="none" spc="0" normalizeH="0" baseline="0" noProof="0" dirty="0">
-              <a:ln>
-                <a:noFill/>
-              </a:ln>
-              <a:solidFill>
-                <a:srgbClr val="C0504D">
-                  <a:lumMod val="75000"/>
-                </a:srgbClr>
-              </a:solidFill>
-              <a:effectLst/>
-              <a:uLnTx/>
-              <a:uFillTx/>
-              <a:latin typeface="Calibri"/>
-              <a:ea typeface="ＭＳ Ｐゴシック" pitchFamily="1" charset="-128"/>
-              <a:cs typeface="+mn-cs"/>
-            </a:endParaRPr>
-          </a:p>
-        </p:txBody>
-      </p:sp>
-      <p:sp>
-        <p:nvSpPr>
-          <p:cNvPr id="17409" name="Title 1"/>
-          <p:cNvSpPr>
-            <a:spLocks noGrp="1"/>
-          </p:cNvSpPr>
-          <p:nvPr>
-            <p:ph type="title"/>
-          </p:nvPr>
-        </p:nvSpPr>
-        <p:spPr/>
-        <p:txBody>
-          <a:bodyPr/>
-          <a:lstStyle/>
-          <a:p>
-            <a:pPr>
-              <a:defRPr sz="2000" b="1">
-                <a:solidFill>
-                  <a:srgbClr val="0F172A"/>
-                </a:solidFill>
-              </a:defRPr>
-            </a:pPr>
-            <a:r>
-              <a:t>RESEARCH, REFERENCES &amp; LIVE DEMONSTRATION</a:t>
-            </a:r>
-          </a:p>
-        </p:txBody>
-      </p:sp>
-      <p:sp>
-        <p:nvSpPr>
-          <p:cNvPr id="6" name="Slide Number Placeholder 5"/>
-          <p:cNvSpPr>
-            <a:spLocks noGrp="1"/>
-          </p:cNvSpPr>
-          <p:nvPr>
-            <p:ph type="sldNum" sz="quarter" idx="12"/>
-          </p:nvPr>
-        </p:nvSpPr>
-        <p:spPr/>
-        <p:txBody>
-          <a:bodyPr/>
-          <a:lstStyle/>
-          <a:p>
-            <a:pPr marL="0" marR="0" lvl="0" indent="0" algn="r" defTabSz="457200" rtl="0" eaLnBrk="1" fontAlgn="base" latinLnBrk="0" hangingPunct="1">
-              <a:lnSpc>
-                <a:spcPct val="100000"/>
-              </a:lnSpc>
-              <a:spcBef>
-                <a:spcPct val="0"/>
-              </a:spcBef>
-              <a:spcAft>
-                <a:spcPct val="0"/>
-              </a:spcAft>
-              <a:buClrTx/>
-              <a:buSzTx/>
-              <a:buFontTx/>
-              <a:buNone/>
-              <a:tabLst/>
-              <a:defRPr/>
-            </a:pPr>
-            <a:fld id="{677C3CE7-23F7-4828-823C-E0205DF2CF97}" type="slidenum">
-              <a:rPr kumimoji="0" lang="en-US" sz="1200" b="1" i="0" u="none" strike="noStrike" kern="1200" cap="none" spc="0" normalizeH="0" baseline="0" noProof="0">
-                <a:ln>
-                  <a:noFill/>
-                </a:ln>
-                <a:solidFill>
-                  <a:prstClr val="white"/>
-                </a:solidFill>
-                <a:effectLst/>
-                <a:uLnTx/>
-                <a:uFillTx/>
-                <a:latin typeface="TradeGothic" pitchFamily="1" charset="0"/>
-                <a:ea typeface="ＭＳ Ｐゴシック" pitchFamily="1" charset="-128"/>
-                <a:cs typeface="+mn-cs"/>
-              </a:rPr>
-              <a:pPr marL="0" marR="0" lvl="0" indent="0" algn="r" defTabSz="457200" rtl="0" eaLnBrk="1" fontAlgn="base" latinLnBrk="0" hangingPunct="1">
-                <a:lnSpc>
-                  <a:spcPct val="100000"/>
-                </a:lnSpc>
-                <a:spcBef>
-                  <a:spcPct val="0"/>
-                </a:spcBef>
-                <a:spcAft>
-                  <a:spcPct val="0"/>
-                </a:spcAft>
-                <a:buClrTx/>
-                <a:buSzTx/>
-                <a:buFontTx/>
-                <a:buNone/>
-                <a:tabLst/>
-                <a:defRPr/>
-              </a:pPr>
-              <a:t>6</a:t>
-            </a:fld>
-            <a:endParaRPr kumimoji="0" lang="en-US" sz="1200" b="1" i="0" u="none" strike="noStrike" kern="1200" cap="none" spc="0" normalizeH="0" baseline="0" noProof="0" dirty="0">
-              <a:ln>
-                <a:noFill/>
-              </a:ln>
-              <a:solidFill>
-                <a:prstClr val="white"/>
-              </a:solidFill>
-              <a:effectLst/>
-              <a:uLnTx/>
-              <a:uFillTx/>
-              <a:latin typeface="TradeGothic" pitchFamily="1" charset="0"/>
-              <a:ea typeface="ＭＳ Ｐゴシック" pitchFamily="1" charset="-128"/>
-              <a:cs typeface="+mn-cs"/>
-            </a:endParaRPr>
-          </a:p>
-        </p:txBody>
-      </p:sp>
-      <p:sp>
-        <p:nvSpPr>
-          <p:cNvPr id="7" name="Footer Placeholder 6"/>
-          <p:cNvSpPr>
-            <a:spLocks noGrp="1"/>
-          </p:cNvSpPr>
-          <p:nvPr>
-            <p:ph type="ftr" sz="quarter" idx="11"/>
-          </p:nvPr>
-        </p:nvSpPr>
-        <p:spPr>
-          <a:xfrm>
-            <a:off x="4648200" y="6356353"/>
-            <a:ext cx="3204000" cy="365125"/>
-          </a:xfrm>
-        </p:spPr>
-        <p:txBody>
-          <a:bodyPr/>
-          <a:lstStyle/>
-          <a:p>
-            <a:pPr marL="0" marR="0" lvl="0" indent="0" algn="ctr" defTabSz="457200" rtl="0" eaLnBrk="1" fontAlgn="auto" latinLnBrk="0" hangingPunct="1">
-              <a:lnSpc>
-                <a:spcPct val="100000"/>
-              </a:lnSpc>
-              <a:spcBef>
-                <a:spcPts val="0"/>
-              </a:spcBef>
-              <a:spcAft>
-                <a:spcPts val="0"/>
-              </a:spcAft>
-              <a:buClrTx/>
-              <a:buSzTx/>
-              <a:buFontTx/>
-              <a:buNone/>
-              <a:tabLst/>
-              <a:defRPr/>
-            </a:pPr>
-            <a:r>
-              <a:rPr kumimoji="0" lang="en-US" sz="1200" b="0" i="0" u="none" strike="noStrike" kern="1200" cap="none" spc="0" normalizeH="0" baseline="0" noProof="0">
-                <a:ln>
-                  <a:noFill/>
-                </a:ln>
-                <a:solidFill>
-                  <a:prstClr val="white"/>
-                </a:solidFill>
-                <a:effectLst/>
-                <a:uLnTx/>
-                <a:uFillTx/>
-                <a:latin typeface="TradeGothic"/>
-                <a:ea typeface="+mn-ea"/>
-                <a:cs typeface="+mn-cs"/>
-              </a:rPr>
-              <a:t>@SIH Idea submission- Template</a:t>
-            </a:r>
-            <a:endParaRPr kumimoji="0" lang="en-US" sz="1200" b="0" i="0" u="none" strike="noStrike" kern="1200" cap="none" spc="0" normalizeH="0" baseline="0" noProof="0" dirty="0">
-              <a:ln>
-                <a:noFill/>
-              </a:ln>
-              <a:solidFill>
-                <a:prstClr val="white"/>
-              </a:solidFill>
-              <a:effectLst/>
-              <a:uLnTx/>
-              <a:uFillTx/>
-              <a:latin typeface="TradeGothic"/>
-              <a:ea typeface="+mn-ea"/>
-              <a:cs typeface="+mn-cs"/>
-            </a:endParaRPr>
-          </a:p>
-        </p:txBody>
-      </p:sp>
-      <p:sp>
-        <p:nvSpPr>
-          <p:cNvPr id="9" name="Oval 8" descr="Your startup LOGO">
-            <a:extLst>
-              <a:ext uri="{FF2B5EF4-FFF2-40B4-BE49-F238E27FC236}">
-                <a16:creationId xmlns:a16="http://schemas.microsoft.com/office/drawing/2014/main" id="{5DBCE864-823D-4A13-9607-5DA1F0ED5FB8}"/>
-              </a:ext>
-              <a:ext uri="{C183D7F6-B498-43B3-948B-1728B52AA6E4}">
-                <adec:decorative xmlns:adec="http://schemas.microsoft.com/office/drawing/2017/decorative" xmlns="" val="0"/>
-              </a:ext>
-            </a:extLst>
-          </p:cNvPr>
-          <p:cNvSpPr/>
-          <p:nvPr/>
-        </p:nvSpPr>
-        <p:spPr>
-          <a:xfrm>
-            <a:off x="329773" y="252246"/>
-            <a:ext cx="1251857" cy="807334"/>
-          </a:xfrm>
-          <a:prstGeom prst="ellipse">
-            <a:avLst/>
-          </a:prstGeom>
-        </p:spPr>
-        <p:style>
-          <a:lnRef idx="2">
-            <a:schemeClr val="accent4"/>
-          </a:lnRef>
-          <a:fillRef idx="1">
-            <a:schemeClr val="lt1"/>
-          </a:fillRef>
-          <a:effectRef idx="0">
-            <a:schemeClr val="accent4"/>
-          </a:effectRef>
-          <a:fontRef idx="minor">
-            <a:schemeClr val="dk1"/>
-          </a:fontRef>
-        </p:style>
-        <p:txBody>
-          <a:bodyPr rtlCol="0" anchor="ctr"/>
-          <a:lstStyle/>
-          <a:p>
-            <a:pPr algn="ctr"/>
-            <a:r>
-              <a:rPr b="1" sz="950">
-                <a:solidFill>
-                  <a:srgbClr val="FFFFFF"/>
-                </a:solidFill>
-              </a:rPr>
-              <a:t>ByteForce_1
-</a:t>
-            </a:r>
-            <a:r>
-              <a:rPr sz="850">
-                <a:solidFill>
-                  <a:srgbClr val="E0F2FE"/>
-                </a:solidFill>
-              </a:rPr>
-              <a:t>(ID: 180219)</a:t>
-            </a:r>
-            <a:endParaRPr lang="en-IN" dirty="0"/>
-          </a:p>
-        </p:txBody>
-      </p:sp>
       <p:pic>
         <p:nvPicPr>
-          <p:cNvPr id="12" name="Picture 11"/>
-          <p:cNvPicPr>
-            <a:picLocks noChangeAspect="1"/>
-          </p:cNvPicPr>
-          <p:nvPr/>
-        </p:nvPicPr>
-        <p:blipFill>
-          <a:blip r:embed="rId3">
-            <a:extLst>
-              <a:ext uri="{28A0092B-C50C-407E-A947-70E740481C1C}">
-                <a14:useLocalDpi xmlns:a14="http://schemas.microsoft.com/office/drawing/2010/main" val="0"/>
-              </a:ext>
-            </a:extLst>
-          </a:blip>
-          <a:stretch>
-            <a:fillRect/>
-          </a:stretch>
-        </p:blipFill>
-        <p:spPr>
-          <a:xfrm>
-            <a:off x="9780086" y="1500"/>
-            <a:ext cx="2249850" cy="1062337"/>
-          </a:xfrm>
-          <a:prstGeom prst="rect">
-            <a:avLst/>
-          </a:prstGeom>
-        </p:spPr>
-      </p:pic>
-      <p:sp>
-        <p:nvSpPr>
-          <p:cNvPr id="17410" name="Rounded Rectangle 17409"/>
-          <p:cNvSpPr/>
-          <p:nvPr/>
-        </p:nvSpPr>
-        <p:spPr>
-          <a:xfrm>
-            <a:off x="502920" y="1188720"/>
-            <a:ext cx="10789920" cy="2057400"/>
-          </a:xfrm>
-          <a:prstGeom prst="roundRect">
-            <a:avLst/>
-          </a:prstGeom>
-          <a:solidFill>
-            <a:srgbClr val="F8FAFC"/>
-          </a:solidFill>
-          <a:ln w="12700">
-            <a:solidFill>
-              <a:srgbClr val="BAE6FD"/>
-            </a:solidFill>
-          </a:ln>
-        </p:spPr>
-        <p:style>
-          <a:lnRef idx="1">
-            <a:schemeClr val="accent1"/>
-          </a:lnRef>
-          <a:fillRef idx="3">
-            <a:schemeClr val="accent1"/>
-          </a:fillRef>
-          <a:effectRef idx="2">
-            <a:schemeClr val="accent1"/>
-          </a:effectRef>
-          <a:fontRef idx="minor">
-            <a:schemeClr val="lt1"/>
-          </a:fontRef>
-        </p:style>
-        <p:txBody>
-          <a:bodyPr rtlCol="0" anchor="ctr" wrap="square" lIns="109728" rIns="109728" tIns="73152"/>
-          <a:lstStyle/>
-          <a:p>
-            <a:pPr algn="ctr">
-              <a:spcAft>
-                <a:spcPts val="300"/>
-              </a:spcAft>
-              <a:defRPr b="1" sz="1000">
-                <a:solidFill>
-                  <a:srgbClr val="0F172A"/>
-                </a:solidFill>
-              </a:defRPr>
-            </a:pPr>
-            <a:r>
-              <a:t>STANDARDS, FORMAL RESEARCH &amp; REGULATORY CITATIONS</a:t>
-            </a:r>
-          </a:p>
-          <a:p>
-            <a:pPr>
-              <a:spcAft>
-                <a:spcPts val="200"/>
-              </a:spcAft>
-            </a:pPr>
-            <a:r>
-              <a:rPr b="1" sz="800">
-                <a:solidFill>
-                  <a:srgbClr val="0284C7"/>
-                </a:solidFill>
-              </a:rPr>
-              <a:t>• The Open Group FAIR Standard: </a:t>
-            </a:r>
-            <a:r>
-              <a:rPr sz="750">
-                <a:solidFill>
-                  <a:srgbClr val="0F172A"/>
-                </a:solidFill>
-              </a:rPr>
-              <a:t>Risk Taxonomy (O-RT) &amp; Risk Analysis (O-RA) for quantitative information risk modeling. </a:t>
-            </a:r>
-            <a:r>
-              <a:rPr b="1" sz="750">
-                <a:solidFill>
-                  <a:srgbClr val="10B981"/>
-                </a:solidFill>
-              </a:rPr>
-              <a:t>[opengroup.org]</a:t>
-            </a:r>
-          </a:p>
-          <a:p>
-            <a:pPr>
-              <a:spcAft>
-                <a:spcPts val="200"/>
-              </a:spcAft>
-            </a:pPr>
-            <a:r>
-              <a:rPr b="1" sz="800">
-                <a:solidFill>
-                  <a:srgbClr val="0284C7"/>
-                </a:solidFill>
-              </a:rPr>
-              <a:t>• NIST SP 800-30 Rev. 1: </a:t>
-            </a:r>
-            <a:r>
-              <a:rPr sz="750">
-                <a:solidFill>
-                  <a:srgbClr val="0F172A"/>
-                </a:solidFill>
-              </a:rPr>
-              <a:t>Guide for Conducting Risk Assessments in Federal Information Systems. </a:t>
-            </a:r>
-            <a:r>
-              <a:rPr b="1" sz="750">
-                <a:solidFill>
-                  <a:srgbClr val="10B981"/>
-                </a:solidFill>
-              </a:rPr>
-              <a:t>[nist.gov]</a:t>
-            </a:r>
-          </a:p>
-          <a:p>
-            <a:pPr>
-              <a:spcAft>
-                <a:spcPts val="200"/>
-              </a:spcAft>
-            </a:pPr>
-            <a:r>
-              <a:rPr b="1" sz="800">
-                <a:solidFill>
-                  <a:srgbClr val="0284C7"/>
-                </a:solidFill>
-              </a:rPr>
-              <a:t>• ISO/IEC 27005:2022: </a:t>
-            </a:r>
-            <a:r>
-              <a:rPr sz="750">
-                <a:solidFill>
-                  <a:srgbClr val="0F172A"/>
-                </a:solidFill>
-              </a:rPr>
-              <a:t>Information security, cybersecurity and privacy protection — Managing risks. </a:t>
-            </a:r>
-            <a:r>
-              <a:rPr b="1" sz="750">
-                <a:solidFill>
-                  <a:srgbClr val="10B981"/>
-                </a:solidFill>
-              </a:rPr>
-              <a:t>[iso.org]</a:t>
-            </a:r>
-          </a:p>
-          <a:p>
-            <a:pPr>
-              <a:spcAft>
-                <a:spcPts val="200"/>
-              </a:spcAft>
-            </a:pPr>
-            <a:r>
-              <a:rPr b="1" sz="800">
-                <a:solidFill>
-                  <a:srgbClr val="0284C7"/>
-                </a:solidFill>
-              </a:rPr>
-              <a:t>• DPDP Act 2023: </a:t>
-            </a:r>
-            <a:r>
-              <a:rPr sz="750">
-                <a:solidFill>
-                  <a:srgbClr val="0F172A"/>
-                </a:solidFill>
-              </a:rPr>
-              <a:t>Digital Personal Data Protection Act, Ministry of Electronics &amp; IT (MeitY), India. </a:t>
-            </a:r>
-            <a:r>
-              <a:rPr b="1" sz="750">
-                <a:solidFill>
-                  <a:srgbClr val="10B981"/>
-                </a:solidFill>
-              </a:rPr>
-              <a:t>[meity.gov.in]</a:t>
-            </a:r>
-          </a:p>
-          <a:p>
-            <a:pPr>
-              <a:spcAft>
-                <a:spcPts val="200"/>
-              </a:spcAft>
-            </a:pPr>
-            <a:r>
-              <a:rPr b="1" sz="800">
-                <a:solidFill>
-                  <a:srgbClr val="0284C7"/>
-                </a:solidFill>
-              </a:rPr>
-              <a:t>• CERT-In Directions (2022): </a:t>
-            </a:r>
-            <a:r>
-              <a:rPr sz="750">
-                <a:solidFill>
-                  <a:srgbClr val="0F172A"/>
-                </a:solidFill>
-              </a:rPr>
-              <a:t>Section 70B mandate for cybersecurity posture and log retention guidelines. </a:t>
-            </a:r>
-            <a:r>
-              <a:rPr b="1" sz="750">
-                <a:solidFill>
-                  <a:srgbClr val="10B981"/>
-                </a:solidFill>
-              </a:rPr>
-              <a:t>[cert-in.org.in]</a:t>
-            </a:r>
-          </a:p>
-          <a:p>
-            <a:pPr>
-              <a:spcAft>
-                <a:spcPts val="200"/>
-              </a:spcAft>
-            </a:pPr>
-            <a:r>
-              <a:rPr b="1" sz="800">
-                <a:solidFill>
-                  <a:srgbClr val="0284C7"/>
-                </a:solidFill>
-              </a:rPr>
-              <a:t>• 0/1 Knapsack Optimization: </a:t>
-            </a:r>
-            <a:r>
-              <a:rPr sz="750">
-                <a:solidFill>
-                  <a:srgbClr val="0F172A"/>
-                </a:solidFill>
-              </a:rPr>
-              <a:t>Dynamic Programming algorithms for resource-constrained risk minimization. </a:t>
-            </a:r>
-            <a:r>
-              <a:rPr b="1" sz="750">
-                <a:solidFill>
-                  <a:srgbClr val="10B981"/>
-                </a:solidFill>
-              </a:rPr>
-              <a:t>[ieee.org]</a:t>
-            </a:r>
-          </a:p>
-          <a:p>
-            <a:pPr>
-              <a:spcAft>
-                <a:spcPts val="200"/>
-              </a:spcAft>
-            </a:pPr>
-            <a:r>
-              <a:rPr b="1" sz="800">
-                <a:solidFill>
-                  <a:srgbClr val="0284C7"/>
-                </a:solidFill>
-              </a:rPr>
-              <a:t>• RFC 6962: Merkle Trees: </a:t>
-            </a:r>
-            <a:r>
-              <a:rPr sz="750">
-                <a:solidFill>
-                  <a:srgbClr val="0F172A"/>
-                </a:solidFill>
-              </a:rPr>
-              <a:t>Verifiable append-only data structures for immutable security telemetry logging. </a:t>
-            </a:r>
-            <a:r>
-              <a:rPr b="1" sz="750">
-                <a:solidFill>
-                  <a:srgbClr val="10B981"/>
-                </a:solidFill>
-              </a:rPr>
-              <a:t>[rfc-editor.org]</a:t>
-            </a:r>
-          </a:p>
-        </p:txBody>
-      </p:sp>
-      <p:pic>
-        <p:nvPicPr>
-          <p:cNvPr id="17411" name="Picture 17410" descr="slide6_uiux_composite.png"/>
+          <p:cNvPr id="2" name="Picture 1" descr="slide_6.png"/>
           <p:cNvPicPr>
             <a:picLocks noChangeAspect="1"/>
           </p:cNvPicPr>
@@ -9772,102 +4936,8 @@
         </p:blipFill>
         <p:spPr>
           <a:xfrm>
-            <a:off x="502920" y="3364992"/>
-            <a:ext cx="7589520" cy="2240280"/>
-          </a:xfrm>
-          <a:prstGeom prst="rect">
-            <a:avLst/>
-          </a:prstGeom>
-        </p:spPr>
-      </p:pic>
-      <p:sp>
-        <p:nvSpPr>
-          <p:cNvPr id="17412" name="Rounded Rectangle 17411"/>
-          <p:cNvSpPr/>
-          <p:nvPr/>
-        </p:nvSpPr>
-        <p:spPr>
-          <a:xfrm>
-            <a:off x="8229600" y="3364992"/>
-            <a:ext cx="3063240" cy="2240280"/>
-          </a:xfrm>
-          <a:prstGeom prst="roundRect">
-            <a:avLst/>
-          </a:prstGeom>
-          <a:solidFill>
-            <a:srgbClr val="0F172A"/>
-          </a:solidFill>
-          <a:ln w="19050">
-            <a:solidFill>
-              <a:srgbClr val="0284C7"/>
-            </a:solidFill>
-          </a:ln>
-        </p:spPr>
-        <p:style>
-          <a:lnRef idx="1">
-            <a:schemeClr val="accent1"/>
-          </a:lnRef>
-          <a:fillRef idx="3">
-            <a:schemeClr val="accent1"/>
-          </a:fillRef>
-          <a:effectRef idx="2">
-            <a:schemeClr val="accent1"/>
-          </a:effectRef>
-          <a:fontRef idx="minor">
-            <a:schemeClr val="lt1"/>
-          </a:fontRef>
-        </p:style>
-        <p:txBody>
-          <a:bodyPr rtlCol="0" anchor="ctr" tIns="73152"/>
-          <a:lstStyle/>
-          <a:p>
-            <a:pPr algn="ctr">
-              <a:defRPr b="1" sz="850">
-                <a:solidFill>
-                  <a:srgbClr val="38BDF8"/>
-                </a:solidFill>
-              </a:defRPr>
-            </a:pPr>
-            <a:r>
-              <a:t>OFFICIAL CODE REPOSITORY</a:t>
-            </a:r>
-          </a:p>
-          <a:p>
-            <a:pPr algn="ctr">
-              <a:spcBef>
-                <a:spcPts val="11160"/>
-              </a:spcBef>
-            </a:pPr>
-            <a:r>
-              <a:rPr sz="700">
-                <a:solidFill>
-                  <a:srgbClr val="CBD5E1"/>
-                </a:solidFill>
-              </a:rPr>
-              <a:t>ByteForce_1 // AURA SENTINEL
-github.com/aryanbaghel756-spec/AURA-SENTINEL</a:t>
-            </a:r>
-          </a:p>
-        </p:txBody>
-      </p:sp>
-      <p:pic>
-        <p:nvPicPr>
-          <p:cNvPr id="17413" name="Picture 17412" descr="github_qr.png"/>
-          <p:cNvPicPr>
-            <a:picLocks noChangeAspect="1"/>
-          </p:cNvPicPr>
-          <p:nvPr/>
-        </p:nvPicPr>
-        <p:blipFill>
-          <a:blip r:embed="rId5"/>
-          <a:stretch>
-            <a:fillRect/>
-          </a:stretch>
-        </p:blipFill>
-        <p:spPr>
-          <a:xfrm>
-            <a:off x="9098280" y="3703320"/>
-            <a:ext cx="1325880" cy="1325880"/>
+            <a:off x="0" y="0"/>
+            <a:ext cx="12191969" cy="6858000"/>
           </a:xfrm>
           <a:prstGeom prst="rect">
             <a:avLst/>
